--- a/public/lessons/year-6-maths/spring/week-14/divide-unit-fractions/teaching-powerpoint-v1.pptx
+++ b/public/lessons/year-6-maths/spring/week-14/divide-unit-fractions/teaching-powerpoint-v1.pptx
@@ -2,24 +2,24 @@
 <file path=ppt/presentation.xml><?xml version="1.0" encoding="utf-8"?>
 <p:presentation xmlns:p="http://schemas.openxmlformats.org/presentationml/2006/main">
   <p:sldMasterIdLst>
-    <p:sldMasterId xmlns:r="http://schemas.openxmlformats.org/officeDocument/2006/relationships" id="2147483648" r:id="R4f3d1ff424e54bda"/>
+    <p:sldMasterId xmlns:r="http://schemas.openxmlformats.org/officeDocument/2006/relationships" id="2147483648" r:id="R71e0228db8f64e0b"/>
   </p:sldMasterIdLst>
   <p:notesMasterIdLst>
-    <p:notesMasterId xmlns:r="http://schemas.openxmlformats.org/officeDocument/2006/relationships" r:id="R09c33536e33d43b2"/>
+    <p:notesMasterId xmlns:r="http://schemas.openxmlformats.org/officeDocument/2006/relationships" r:id="R835b7c1e6b8c41bd"/>
   </p:notesMasterIdLst>
   <p:sldIdLst>
-    <p:sldId xmlns:r="http://schemas.openxmlformats.org/officeDocument/2006/relationships" id="256" r:id="R4b64722f72b9478c"/>
-    <p:sldId xmlns:r="http://schemas.openxmlformats.org/officeDocument/2006/relationships" id="257" r:id="R3034ac09730a4ab3"/>
-    <p:sldId xmlns:r="http://schemas.openxmlformats.org/officeDocument/2006/relationships" id="258" r:id="R32a7047c1a2d4de4"/>
-    <p:sldId xmlns:r="http://schemas.openxmlformats.org/officeDocument/2006/relationships" id="259" r:id="R4e7d06daf60a4c50"/>
-    <p:sldId xmlns:r="http://schemas.openxmlformats.org/officeDocument/2006/relationships" id="260" r:id="R1dc9f65b482e4c4d"/>
-    <p:sldId xmlns:r="http://schemas.openxmlformats.org/officeDocument/2006/relationships" id="261" r:id="Rd32df357e9be4f84"/>
-    <p:sldId xmlns:r="http://schemas.openxmlformats.org/officeDocument/2006/relationships" id="262" r:id="Ra3ae85d6adeb474f"/>
-    <p:sldId xmlns:r="http://schemas.openxmlformats.org/officeDocument/2006/relationships" id="263" r:id="R3e627982f43448a9"/>
-    <p:sldId xmlns:r="http://schemas.openxmlformats.org/officeDocument/2006/relationships" id="264" r:id="R46c2627a69df4254"/>
-    <p:sldId xmlns:r="http://schemas.openxmlformats.org/officeDocument/2006/relationships" id="265" r:id="Ra84875f3197644ed"/>
-    <p:sldId xmlns:r="http://schemas.openxmlformats.org/officeDocument/2006/relationships" id="266" r:id="R474114b18f834a76"/>
-    <p:sldId xmlns:r="http://schemas.openxmlformats.org/officeDocument/2006/relationships" id="267" r:id="R1a11ec9916d7471b"/>
+    <p:sldId xmlns:r="http://schemas.openxmlformats.org/officeDocument/2006/relationships" id="256" r:id="Ra61e28d9de4148c5"/>
+    <p:sldId xmlns:r="http://schemas.openxmlformats.org/officeDocument/2006/relationships" id="257" r:id="R37fc6e4a583f4869"/>
+    <p:sldId xmlns:r="http://schemas.openxmlformats.org/officeDocument/2006/relationships" id="258" r:id="R2bffda9096d54b6c"/>
+    <p:sldId xmlns:r="http://schemas.openxmlformats.org/officeDocument/2006/relationships" id="259" r:id="Re0def41da0984cb6"/>
+    <p:sldId xmlns:r="http://schemas.openxmlformats.org/officeDocument/2006/relationships" id="260" r:id="R9711628093554b92"/>
+    <p:sldId xmlns:r="http://schemas.openxmlformats.org/officeDocument/2006/relationships" id="261" r:id="Rc44a6d908d604255"/>
+    <p:sldId xmlns:r="http://schemas.openxmlformats.org/officeDocument/2006/relationships" id="262" r:id="R90d7dfc9bde548e3"/>
+    <p:sldId xmlns:r="http://schemas.openxmlformats.org/officeDocument/2006/relationships" id="263" r:id="R1e4b72adca5e43ca"/>
+    <p:sldId xmlns:r="http://schemas.openxmlformats.org/officeDocument/2006/relationships" id="264" r:id="R2515d887c26d462c"/>
+    <p:sldId xmlns:r="http://schemas.openxmlformats.org/officeDocument/2006/relationships" id="265" r:id="Rfbaeb88bf8b1467a"/>
+    <p:sldId xmlns:r="http://schemas.openxmlformats.org/officeDocument/2006/relationships" id="266" r:id="Rc921d77f137f49d6"/>
+    <p:sldId xmlns:r="http://schemas.openxmlformats.org/officeDocument/2006/relationships" id="267" r:id="Rfe72537f652d4b7c"/>
   </p:sldIdLst>
   <p:sldSz cx="12192000" cy="6858000"/>
   <p:notesSz cx="6858000" cy="9144000"/>
@@ -873,7 +873,7 @@
           <a:lstStyle xmlns:a="http://schemas.openxmlformats.org/drawingml/2006/main"/>
           <a:p xmlns:a="http://schemas.openxmlformats.org/drawingml/2006/main">
             <a:r>
-              <a:t>I do. Reveal the question, setup and each calculation stage one click at a time. Pupils watch before copying. Model answer: 1/12.</a:t>
+              <a:t>I do. Reveal the question, then reveal each mathematical change one click at a time. Point to the numbers and operation that changed before moving to the next line. Final answer: 1/12.</a:t>
             </a:r>
           </a:p>
         </p:txBody>
@@ -1291,7 +1291,7 @@
   </p:cSld>
   <p:clrMap bg1="lt1" tx1="dk1" bg2="lt2" tx2="dk2" accent1="accent1" accent2="accent2" accent3="accent3" accent4="accent4" accent5="accent5" accent6="accent6" hlink="hlink" folHlink="folHlink"/>
   <p:sldLayoutIdLst>
-    <p:sldLayoutId xmlns:r="http://schemas.openxmlformats.org/officeDocument/2006/relationships" id="2147483649" r:id="Rb9f955346c51436a"/>
+    <p:sldLayoutId xmlns:r="http://schemas.openxmlformats.org/officeDocument/2006/relationships" id="2147483649" r:id="R61914c5939944088"/>
   </p:sldLayoutIdLst>
   <p:txStyles>
     <p:titleStyle>
@@ -1842,7 +1842,7 @@
           <p:cNvPr id="12" name="">
             <a:extLst xmlns:a="http://schemas.openxmlformats.org/drawingml/2006/main">
               <a:ext uri="{FF2B5EF4-FFF2-40B4-BE49-F238E27FC236}">
-                <a16:creationId xmlns:a16="http://schemas.microsoft.com/office/drawing/2014/main" id="{4D7359C8-3257-4B01-9BE9-7E5B7A3DC04D}"/>
+                <a16:creationId xmlns:a16="http://schemas.microsoft.com/office/drawing/2014/main" id="{F4D8796E-52F4-41A5-8F1F-34F01F7D148D}"/>
               </a:ext>
             </a:extLst>
           </p:cNvPr>
@@ -1874,7 +1874,7 @@
           <p:cNvPr id="2" name="">
             <a:extLst xmlns:a="http://schemas.openxmlformats.org/drawingml/2006/main">
               <a:ext uri="{FF2B5EF4-FFF2-40B4-BE49-F238E27FC236}">
-                <a16:creationId xmlns:a16="http://schemas.microsoft.com/office/drawing/2014/main" id="{808E4E8C-6CEF-4479-BC1C-510197F3F2A6}"/>
+                <a16:creationId xmlns:a16="http://schemas.microsoft.com/office/drawing/2014/main" id="{B06B8737-9BBC-48B5-A7B4-03B466B3E222}"/>
               </a:ext>
             </a:extLst>
           </p:cNvPr>
@@ -1931,7 +1931,7 @@
           <p:cNvPr id="3" name="">
             <a:extLst xmlns:a="http://schemas.openxmlformats.org/drawingml/2006/main">
               <a:ext uri="{FF2B5EF4-FFF2-40B4-BE49-F238E27FC236}">
-                <a16:creationId xmlns:a16="http://schemas.microsoft.com/office/drawing/2014/main" id="{B1522DF2-E28E-4949-9BD4-96A8DCC76CBE}"/>
+                <a16:creationId xmlns:a16="http://schemas.microsoft.com/office/drawing/2014/main" id="{C0758F5B-86BF-4AC7-AC19-E3B7B4FF79BB}"/>
               </a:ext>
             </a:extLst>
           </p:cNvPr>
@@ -1965,7 +1965,7 @@
           <p:cNvPr id="4" name="">
             <a:extLst xmlns:a="http://schemas.openxmlformats.org/drawingml/2006/main">
               <a:ext uri="{FF2B5EF4-FFF2-40B4-BE49-F238E27FC236}">
-                <a16:creationId xmlns:a16="http://schemas.microsoft.com/office/drawing/2014/main" id="{0C2AADFC-72AE-4D9E-9D6D-3F61500F42B8}"/>
+                <a16:creationId xmlns:a16="http://schemas.microsoft.com/office/drawing/2014/main" id="{63CD10DD-A69A-4AE7-9B03-8F119B126569}"/>
               </a:ext>
             </a:extLst>
           </p:cNvPr>
@@ -2022,7 +2022,7 @@
           <p:cNvPr id="5" name="">
             <a:extLst xmlns:a="http://schemas.openxmlformats.org/drawingml/2006/main">
               <a:ext uri="{FF2B5EF4-FFF2-40B4-BE49-F238E27FC236}">
-                <a16:creationId xmlns:a16="http://schemas.microsoft.com/office/drawing/2014/main" id="{1563D55C-F402-4AC0-9D38-5FE7ED7306C7}"/>
+                <a16:creationId xmlns:a16="http://schemas.microsoft.com/office/drawing/2014/main" id="{99E68ED3-9D7D-4C5B-87CF-7C0341F4D0FC}"/>
               </a:ext>
             </a:extLst>
           </p:cNvPr>
@@ -2079,7 +2079,7 @@
           <p:cNvPr id="6" name="">
             <a:extLst xmlns:a="http://schemas.openxmlformats.org/drawingml/2006/main">
               <a:ext uri="{FF2B5EF4-FFF2-40B4-BE49-F238E27FC236}">
-                <a16:creationId xmlns:a16="http://schemas.microsoft.com/office/drawing/2014/main" id="{968EBD12-5C51-4312-A8DB-5AC96FEC5213}"/>
+                <a16:creationId xmlns:a16="http://schemas.microsoft.com/office/drawing/2014/main" id="{11DAE649-1AA9-46B2-AF22-FE3015D335FC}"/>
               </a:ext>
             </a:extLst>
           </p:cNvPr>
@@ -2113,7 +2113,7 @@
           <p:cNvPr id="7" name="">
             <a:extLst xmlns:a="http://schemas.openxmlformats.org/drawingml/2006/main">
               <a:ext uri="{FF2B5EF4-FFF2-40B4-BE49-F238E27FC236}">
-                <a16:creationId xmlns:a16="http://schemas.microsoft.com/office/drawing/2014/main" id="{D92ED3AF-2195-471B-B987-D37E85FAD9EA}"/>
+                <a16:creationId xmlns:a16="http://schemas.microsoft.com/office/drawing/2014/main" id="{5C6D0288-AF1C-4570-B90F-975098C28134}"/>
               </a:ext>
             </a:extLst>
           </p:cNvPr>
@@ -2170,7 +2170,7 @@
           <p:cNvPr id="8" name="">
             <a:extLst xmlns:a="http://schemas.openxmlformats.org/drawingml/2006/main">
               <a:ext uri="{FF2B5EF4-FFF2-40B4-BE49-F238E27FC236}">
-                <a16:creationId xmlns:a16="http://schemas.microsoft.com/office/drawing/2014/main" id="{AF39F8B8-799B-401F-9776-424F25BB95B1}"/>
+                <a16:creationId xmlns:a16="http://schemas.microsoft.com/office/drawing/2014/main" id="{14AC69CE-C2FA-4B54-96BE-47A3D52B2961}"/>
               </a:ext>
             </a:extLst>
           </p:cNvPr>
@@ -2227,7 +2227,7 @@
           <p:cNvPr id="9" name="">
             <a:extLst xmlns:a="http://schemas.openxmlformats.org/drawingml/2006/main">
               <a:ext uri="{FF2B5EF4-FFF2-40B4-BE49-F238E27FC236}">
-                <a16:creationId xmlns:a16="http://schemas.microsoft.com/office/drawing/2014/main" id="{064C7B26-97C7-4EE9-A1A1-268D1FFD4C95}"/>
+                <a16:creationId xmlns:a16="http://schemas.microsoft.com/office/drawing/2014/main" id="{1873BB7C-B6CC-4E18-8D4C-60798ABCDBE3}"/>
               </a:ext>
             </a:extLst>
           </p:cNvPr>
@@ -2284,7 +2284,7 @@
           <p:cNvPr id="10" name="">
             <a:extLst xmlns:a="http://schemas.openxmlformats.org/drawingml/2006/main">
               <a:ext uri="{FF2B5EF4-FFF2-40B4-BE49-F238E27FC236}">
-                <a16:creationId xmlns:a16="http://schemas.microsoft.com/office/drawing/2014/main" id="{B7570889-C96A-41C9-9BB1-C3FBA9B80D35}"/>
+                <a16:creationId xmlns:a16="http://schemas.microsoft.com/office/drawing/2014/main" id="{E49F7375-0282-411A-9617-AA11B9C7B344}"/>
               </a:ext>
             </a:extLst>
           </p:cNvPr>
@@ -2341,7 +2341,7 @@
           <p:cNvPr id="11" name="">
             <a:extLst xmlns:a="http://schemas.openxmlformats.org/drawingml/2006/main">
               <a:ext uri="{FF2B5EF4-FFF2-40B4-BE49-F238E27FC236}">
-                <a16:creationId xmlns:a16="http://schemas.microsoft.com/office/drawing/2014/main" id="{CC280377-02AC-49BB-9AEB-48D306B9794E}"/>
+                <a16:creationId xmlns:a16="http://schemas.microsoft.com/office/drawing/2014/main" id="{0F011680-9B4B-4624-A4D8-5658048EE792}"/>
               </a:ext>
             </a:extLst>
           </p:cNvPr>
@@ -2396,7 +2396,7 @@
     </p:spTree>
     <p:extLst>
       <p:ext uri="{BB962C8B-B14F-4D97-AF65-F5344CB8AC3E}">
-        <p14:creationId xmlns:p14="http://schemas.microsoft.com/office/powerpoint/2010/main" val="1863797772"/>
+        <p14:creationId xmlns:p14="http://schemas.microsoft.com/office/powerpoint/2010/main" val="1751230578"/>
       </p:ext>
     </p:extLst>
   </p:cSld>
@@ -2427,7 +2427,7 @@
           <p:cNvPr id="14" name="">
             <a:extLst xmlns:a="http://schemas.openxmlformats.org/drawingml/2006/main">
               <a:ext uri="{FF2B5EF4-FFF2-40B4-BE49-F238E27FC236}">
-                <a16:creationId xmlns:a16="http://schemas.microsoft.com/office/drawing/2014/main" id="{E9007A1C-1E02-490B-97D5-B029AF12DE9A}"/>
+                <a16:creationId xmlns:a16="http://schemas.microsoft.com/office/drawing/2014/main" id="{F036539E-BE08-4911-886D-2597026E0333}"/>
               </a:ext>
             </a:extLst>
           </p:cNvPr>
@@ -2459,7 +2459,7 @@
           <p:cNvPr id="2" name="">
             <a:extLst xmlns:a="http://schemas.openxmlformats.org/drawingml/2006/main">
               <a:ext uri="{FF2B5EF4-FFF2-40B4-BE49-F238E27FC236}">
-                <a16:creationId xmlns:a16="http://schemas.microsoft.com/office/drawing/2014/main" id="{1EFB0CAC-47EF-41F1-9E19-6AD92AFBC20B}"/>
+                <a16:creationId xmlns:a16="http://schemas.microsoft.com/office/drawing/2014/main" id="{6829A7E5-8CB3-43E5-9FC7-B299EDA1A7D2}"/>
               </a:ext>
             </a:extLst>
           </p:cNvPr>
@@ -2516,7 +2516,7 @@
           <p:cNvPr id="3" name="">
             <a:extLst xmlns:a="http://schemas.openxmlformats.org/drawingml/2006/main">
               <a:ext uri="{FF2B5EF4-FFF2-40B4-BE49-F238E27FC236}">
-                <a16:creationId xmlns:a16="http://schemas.microsoft.com/office/drawing/2014/main" id="{841EE0F4-C2CB-4DF6-8735-20C74071818A}"/>
+                <a16:creationId xmlns:a16="http://schemas.microsoft.com/office/drawing/2014/main" id="{D946D89D-9AB2-4C52-8F90-62D1CCAC952A}"/>
               </a:ext>
             </a:extLst>
           </p:cNvPr>
@@ -2548,7 +2548,7 @@
           <p:cNvPr id="4" name="">
             <a:extLst xmlns:a="http://schemas.openxmlformats.org/drawingml/2006/main">
               <a:ext uri="{FF2B5EF4-FFF2-40B4-BE49-F238E27FC236}">
-                <a16:creationId xmlns:a16="http://schemas.microsoft.com/office/drawing/2014/main" id="{7B99DE65-C04D-49AB-94D6-710255492590}"/>
+                <a16:creationId xmlns:a16="http://schemas.microsoft.com/office/drawing/2014/main" id="{C5D387C6-CBA0-4DAF-9563-83D905A65B4B}"/>
               </a:ext>
             </a:extLst>
           </p:cNvPr>
@@ -2605,7 +2605,7 @@
           <p:cNvPr id="5" name="">
             <a:extLst xmlns:a="http://schemas.openxmlformats.org/drawingml/2006/main">
               <a:ext uri="{FF2B5EF4-FFF2-40B4-BE49-F238E27FC236}">
-                <a16:creationId xmlns:a16="http://schemas.microsoft.com/office/drawing/2014/main" id="{0D3CBD4F-21DD-4790-9FB1-3EDC3F323571}"/>
+                <a16:creationId xmlns:a16="http://schemas.microsoft.com/office/drawing/2014/main" id="{2C63B309-A483-4A38-B5DF-5BD628DB9E5F}"/>
               </a:ext>
             </a:extLst>
           </p:cNvPr>
@@ -2662,7 +2662,7 @@
           <p:cNvPr id="6" name="">
             <a:extLst xmlns:a="http://schemas.openxmlformats.org/drawingml/2006/main">
               <a:ext uri="{FF2B5EF4-FFF2-40B4-BE49-F238E27FC236}">
-                <a16:creationId xmlns:a16="http://schemas.microsoft.com/office/drawing/2014/main" id="{2C3C20D2-DF5A-4BA3-9F3A-38C615EC6E08}"/>
+                <a16:creationId xmlns:a16="http://schemas.microsoft.com/office/drawing/2014/main" id="{4291CB6C-EDCA-4653-BEA9-1A9B623A5926}"/>
               </a:ext>
             </a:extLst>
           </p:cNvPr>
@@ -2719,7 +2719,7 @@
           <p:cNvPr id="7" name="">
             <a:extLst xmlns:a="http://schemas.openxmlformats.org/drawingml/2006/main">
               <a:ext uri="{FF2B5EF4-FFF2-40B4-BE49-F238E27FC236}">
-                <a16:creationId xmlns:a16="http://schemas.microsoft.com/office/drawing/2014/main" id="{AB16E688-B6F6-4F36-9D97-AADF68AF8EA8}"/>
+                <a16:creationId xmlns:a16="http://schemas.microsoft.com/office/drawing/2014/main" id="{F3524E9A-E7EE-4C0F-9ED2-D921DFC8BD80}"/>
               </a:ext>
             </a:extLst>
           </p:cNvPr>
@@ -2751,7 +2751,7 @@
           <p:cNvPr id="8" name="">
             <a:extLst xmlns:a="http://schemas.openxmlformats.org/drawingml/2006/main">
               <a:ext uri="{FF2B5EF4-FFF2-40B4-BE49-F238E27FC236}">
-                <a16:creationId xmlns:a16="http://schemas.microsoft.com/office/drawing/2014/main" id="{98CAA8E9-CDF8-4E83-8A73-85BDD2910E29}"/>
+                <a16:creationId xmlns:a16="http://schemas.microsoft.com/office/drawing/2014/main" id="{647DB94D-5F80-4294-BFF6-254FD7B242EE}"/>
               </a:ext>
             </a:extLst>
           </p:cNvPr>
@@ -2808,7 +2808,7 @@
           <p:cNvPr id="9" name="">
             <a:extLst xmlns:a="http://schemas.openxmlformats.org/drawingml/2006/main">
               <a:ext uri="{FF2B5EF4-FFF2-40B4-BE49-F238E27FC236}">
-                <a16:creationId xmlns:a16="http://schemas.microsoft.com/office/drawing/2014/main" id="{07D4100D-C5D2-442A-927D-52C0FEFF9CEB}"/>
+                <a16:creationId xmlns:a16="http://schemas.microsoft.com/office/drawing/2014/main" id="{68FFCB8A-29A8-4972-B5FA-F96D6D719726}"/>
               </a:ext>
             </a:extLst>
           </p:cNvPr>
@@ -2865,7 +2865,7 @@
           <p:cNvPr id="10" name="">
             <a:extLst xmlns:a="http://schemas.openxmlformats.org/drawingml/2006/main">
               <a:ext uri="{FF2B5EF4-FFF2-40B4-BE49-F238E27FC236}">
-                <a16:creationId xmlns:a16="http://schemas.microsoft.com/office/drawing/2014/main" id="{1A1A95F5-5A9E-45D5-A5F4-874F59077CC9}"/>
+                <a16:creationId xmlns:a16="http://schemas.microsoft.com/office/drawing/2014/main" id="{A19F9602-2093-4B73-80BE-1010B6B9BDBA}"/>
               </a:ext>
             </a:extLst>
           </p:cNvPr>
@@ -2922,7 +2922,7 @@
           <p:cNvPr id="11" name="">
             <a:extLst xmlns:a="http://schemas.openxmlformats.org/drawingml/2006/main">
               <a:ext uri="{FF2B5EF4-FFF2-40B4-BE49-F238E27FC236}">
-                <a16:creationId xmlns:a16="http://schemas.microsoft.com/office/drawing/2014/main" id="{ACA43059-E438-4CFA-A72D-A8474403C772}"/>
+                <a16:creationId xmlns:a16="http://schemas.microsoft.com/office/drawing/2014/main" id="{C3263DA5-8645-4CB4-9825-D4FFE9B20DDB}"/>
               </a:ext>
             </a:extLst>
           </p:cNvPr>
@@ -2979,7 +2979,7 @@
           <p:cNvPr id="12" name="">
             <a:extLst xmlns:a="http://schemas.openxmlformats.org/drawingml/2006/main">
               <a:ext uri="{FF2B5EF4-FFF2-40B4-BE49-F238E27FC236}">
-                <a16:creationId xmlns:a16="http://schemas.microsoft.com/office/drawing/2014/main" id="{E1061368-FB71-4AF4-A9E5-58B83FD2FA90}"/>
+                <a16:creationId xmlns:a16="http://schemas.microsoft.com/office/drawing/2014/main" id="{AF31BFF8-06D8-467B-B9C5-4784DF8B8177}"/>
               </a:ext>
             </a:extLst>
           </p:cNvPr>
@@ -3036,7 +3036,7 @@
           <p:cNvPr id="13" name="">
             <a:extLst xmlns:a="http://schemas.openxmlformats.org/drawingml/2006/main">
               <a:ext uri="{FF2B5EF4-FFF2-40B4-BE49-F238E27FC236}">
-                <a16:creationId xmlns:a16="http://schemas.microsoft.com/office/drawing/2014/main" id="{E81DED3F-D6E0-401A-9FB0-A811FB67200F}"/>
+                <a16:creationId xmlns:a16="http://schemas.microsoft.com/office/drawing/2014/main" id="{6767163F-5F92-4BA7-BCBE-E244CE182637}"/>
               </a:ext>
             </a:extLst>
           </p:cNvPr>
@@ -3091,7 +3091,7 @@
     </p:spTree>
     <p:extLst>
       <p:ext uri="{BB962C8B-B14F-4D97-AF65-F5344CB8AC3E}">
-        <p14:creationId xmlns:p14="http://schemas.microsoft.com/office/powerpoint/2010/main" val="926287546"/>
+        <p14:creationId xmlns:p14="http://schemas.microsoft.com/office/powerpoint/2010/main" val="1720838196"/>
       </p:ext>
     </p:extLst>
   </p:cSld>
@@ -3292,7 +3292,7 @@
           <p:cNvPr id="19" name="">
             <a:extLst xmlns:a="http://schemas.openxmlformats.org/drawingml/2006/main">
               <a:ext uri="{FF2B5EF4-FFF2-40B4-BE49-F238E27FC236}">
-                <a16:creationId xmlns:a16="http://schemas.microsoft.com/office/drawing/2014/main" id="{930E1AE9-B9EE-4DA1-9E38-98A3023407A5}"/>
+                <a16:creationId xmlns:a16="http://schemas.microsoft.com/office/drawing/2014/main" id="{852B866E-CE44-43EE-969D-14AEEECFD3EC}"/>
               </a:ext>
             </a:extLst>
           </p:cNvPr>
@@ -3324,7 +3324,7 @@
           <p:cNvPr id="2" name="">
             <a:extLst xmlns:a="http://schemas.openxmlformats.org/drawingml/2006/main">
               <a:ext uri="{FF2B5EF4-FFF2-40B4-BE49-F238E27FC236}">
-                <a16:creationId xmlns:a16="http://schemas.microsoft.com/office/drawing/2014/main" id="{C79B06D2-7CD2-4325-8149-A72B06EAE355}"/>
+                <a16:creationId xmlns:a16="http://schemas.microsoft.com/office/drawing/2014/main" id="{3CF9F61D-A055-4C3B-93CE-6ABC82426C17}"/>
               </a:ext>
             </a:extLst>
           </p:cNvPr>
@@ -3381,7 +3381,7 @@
           <p:cNvPr id="3" name="">
             <a:extLst xmlns:a="http://schemas.openxmlformats.org/drawingml/2006/main">
               <a:ext uri="{FF2B5EF4-FFF2-40B4-BE49-F238E27FC236}">
-                <a16:creationId xmlns:a16="http://schemas.microsoft.com/office/drawing/2014/main" id="{670DA624-0A4A-4B35-9BC7-1205BB8A7B05}"/>
+                <a16:creationId xmlns:a16="http://schemas.microsoft.com/office/drawing/2014/main" id="{4F892BF9-3AFB-4A84-B144-AF90DF1221FB}"/>
               </a:ext>
             </a:extLst>
           </p:cNvPr>
@@ -3413,7 +3413,7 @@
           <p:cNvPr id="4" name="">
             <a:extLst xmlns:a="http://schemas.openxmlformats.org/drawingml/2006/main">
               <a:ext uri="{FF2B5EF4-FFF2-40B4-BE49-F238E27FC236}">
-                <a16:creationId xmlns:a16="http://schemas.microsoft.com/office/drawing/2014/main" id="{A78E82CC-598E-4191-871A-BABBD9066513}"/>
+                <a16:creationId xmlns:a16="http://schemas.microsoft.com/office/drawing/2014/main" id="{C4509473-7F5E-45FC-9FDE-D04E46723EA1}"/>
               </a:ext>
             </a:extLst>
           </p:cNvPr>
@@ -3470,7 +3470,7 @@
           <p:cNvPr id="5" name="">
             <a:extLst xmlns:a="http://schemas.openxmlformats.org/drawingml/2006/main">
               <a:ext uri="{FF2B5EF4-FFF2-40B4-BE49-F238E27FC236}">
-                <a16:creationId xmlns:a16="http://schemas.microsoft.com/office/drawing/2014/main" id="{E701CE04-EBF4-445F-A938-2693A1663444}"/>
+                <a16:creationId xmlns:a16="http://schemas.microsoft.com/office/drawing/2014/main" id="{E9E2E83C-37ED-4325-ABE8-F03EBAD45CF2}"/>
               </a:ext>
             </a:extLst>
           </p:cNvPr>
@@ -3527,7 +3527,7 @@
           <p:cNvPr id="6" name="">
             <a:extLst xmlns:a="http://schemas.openxmlformats.org/drawingml/2006/main">
               <a:ext uri="{FF2B5EF4-FFF2-40B4-BE49-F238E27FC236}">
-                <a16:creationId xmlns:a16="http://schemas.microsoft.com/office/drawing/2014/main" id="{845A90E4-BDF3-4DE1-926D-A2B1CC9AFBBB}"/>
+                <a16:creationId xmlns:a16="http://schemas.microsoft.com/office/drawing/2014/main" id="{35E1FD46-49B0-42CE-9215-247EFD34FAF5}"/>
               </a:ext>
             </a:extLst>
           </p:cNvPr>
@@ -3584,7 +3584,7 @@
           <p:cNvPr id="7" name="">
             <a:extLst xmlns:a="http://schemas.openxmlformats.org/drawingml/2006/main">
               <a:ext uri="{FF2B5EF4-FFF2-40B4-BE49-F238E27FC236}">
-                <a16:creationId xmlns:a16="http://schemas.microsoft.com/office/drawing/2014/main" id="{503392E9-3FCF-44E7-981E-11C974FEF355}"/>
+                <a16:creationId xmlns:a16="http://schemas.microsoft.com/office/drawing/2014/main" id="{7B4454D0-C89D-4D6A-BCB6-12E32EB92B9D}"/>
               </a:ext>
             </a:extLst>
           </p:cNvPr>
@@ -3616,7 +3616,7 @@
           <p:cNvPr id="8" name="">
             <a:extLst xmlns:a="http://schemas.openxmlformats.org/drawingml/2006/main">
               <a:ext uri="{FF2B5EF4-FFF2-40B4-BE49-F238E27FC236}">
-                <a16:creationId xmlns:a16="http://schemas.microsoft.com/office/drawing/2014/main" id="{264BEC4D-CF01-4309-9EE1-E90F7F2E54FC}"/>
+                <a16:creationId xmlns:a16="http://schemas.microsoft.com/office/drawing/2014/main" id="{9AC0A473-8FBE-4102-A5E8-05E813ABDC81}"/>
               </a:ext>
             </a:extLst>
           </p:cNvPr>
@@ -3673,7 +3673,7 @@
           <p:cNvPr id="9" name="">
             <a:extLst xmlns:a="http://schemas.openxmlformats.org/drawingml/2006/main">
               <a:ext uri="{FF2B5EF4-FFF2-40B4-BE49-F238E27FC236}">
-                <a16:creationId xmlns:a16="http://schemas.microsoft.com/office/drawing/2014/main" id="{7ACAF3F2-3229-4432-A169-A620A7E0AFC2}"/>
+                <a16:creationId xmlns:a16="http://schemas.microsoft.com/office/drawing/2014/main" id="{2327C907-F9CD-4F56-BE4B-3BEBB0009C88}"/>
               </a:ext>
             </a:extLst>
           </p:cNvPr>
@@ -3730,7 +3730,7 @@
           <p:cNvPr id="10" name="">
             <a:extLst xmlns:a="http://schemas.openxmlformats.org/drawingml/2006/main">
               <a:ext uri="{FF2B5EF4-FFF2-40B4-BE49-F238E27FC236}">
-                <a16:creationId xmlns:a16="http://schemas.microsoft.com/office/drawing/2014/main" id="{C262B9B1-0C6E-40FC-9B12-A1E676FE6DC4}"/>
+                <a16:creationId xmlns:a16="http://schemas.microsoft.com/office/drawing/2014/main" id="{B23E98F8-2385-4A59-AF73-4F1ECBF4D4BD}"/>
               </a:ext>
             </a:extLst>
           </p:cNvPr>
@@ -3787,7 +3787,7 @@
           <p:cNvPr id="11" name="">
             <a:extLst xmlns:a="http://schemas.openxmlformats.org/drawingml/2006/main">
               <a:ext uri="{FF2B5EF4-FFF2-40B4-BE49-F238E27FC236}">
-                <a16:creationId xmlns:a16="http://schemas.microsoft.com/office/drawing/2014/main" id="{74AFEB94-5556-4EC3-88D7-84C157EA311C}"/>
+                <a16:creationId xmlns:a16="http://schemas.microsoft.com/office/drawing/2014/main" id="{FE813168-6310-4A54-A6EC-597A4393ADB4}"/>
               </a:ext>
             </a:extLst>
           </p:cNvPr>
@@ -3821,7 +3821,7 @@
           <p:cNvPr id="12" name="">
             <a:extLst xmlns:a="http://schemas.openxmlformats.org/drawingml/2006/main">
               <a:ext uri="{FF2B5EF4-FFF2-40B4-BE49-F238E27FC236}">
-                <a16:creationId xmlns:a16="http://schemas.microsoft.com/office/drawing/2014/main" id="{3CB0BC8A-5BED-45AE-9F5E-C2CA39C694A2}"/>
+                <a16:creationId xmlns:a16="http://schemas.microsoft.com/office/drawing/2014/main" id="{489ABD02-2984-49B3-9B35-9A7BBCE91745}"/>
               </a:ext>
             </a:extLst>
           </p:cNvPr>
@@ -3878,7 +3878,7 @@
           <p:cNvPr id="13" name="">
             <a:extLst xmlns:a="http://schemas.openxmlformats.org/drawingml/2006/main">
               <a:ext uri="{FF2B5EF4-FFF2-40B4-BE49-F238E27FC236}">
-                <a16:creationId xmlns:a16="http://schemas.microsoft.com/office/drawing/2014/main" id="{32CC3D12-B692-46A5-A3FF-8F81A6B84F4D}"/>
+                <a16:creationId xmlns:a16="http://schemas.microsoft.com/office/drawing/2014/main" id="{614CA7BB-3FAB-4163-ABD0-86A512CC0831}"/>
               </a:ext>
             </a:extLst>
           </p:cNvPr>
@@ -3935,7 +3935,7 @@
           <p:cNvPr id="14" name="">
             <a:extLst xmlns:a="http://schemas.openxmlformats.org/drawingml/2006/main">
               <a:ext uri="{FF2B5EF4-FFF2-40B4-BE49-F238E27FC236}">
-                <a16:creationId xmlns:a16="http://schemas.microsoft.com/office/drawing/2014/main" id="{D053770D-AE7A-4B8D-9F0B-0BAA6A9CF348}"/>
+                <a16:creationId xmlns:a16="http://schemas.microsoft.com/office/drawing/2014/main" id="{7938D706-F056-4E29-B649-3B0297148B41}"/>
               </a:ext>
             </a:extLst>
           </p:cNvPr>
@@ -3992,7 +3992,7 @@
           <p:cNvPr id="15" name="">
             <a:extLst xmlns:a="http://schemas.openxmlformats.org/drawingml/2006/main">
               <a:ext uri="{FF2B5EF4-FFF2-40B4-BE49-F238E27FC236}">
-                <a16:creationId xmlns:a16="http://schemas.microsoft.com/office/drawing/2014/main" id="{ACF5E31F-65D9-480F-8054-23FFD7B4ACA2}"/>
+                <a16:creationId xmlns:a16="http://schemas.microsoft.com/office/drawing/2014/main" id="{E21A2A03-628C-4BC7-9EE7-32E690ED0DD7}"/>
               </a:ext>
             </a:extLst>
           </p:cNvPr>
@@ -4026,7 +4026,7 @@
           <p:cNvPr id="16" name="">
             <a:extLst xmlns:a="http://schemas.openxmlformats.org/drawingml/2006/main">
               <a:ext uri="{FF2B5EF4-FFF2-40B4-BE49-F238E27FC236}">
-                <a16:creationId xmlns:a16="http://schemas.microsoft.com/office/drawing/2014/main" id="{DE8E111D-D3B3-47D3-A789-FEA889E863B8}"/>
+                <a16:creationId xmlns:a16="http://schemas.microsoft.com/office/drawing/2014/main" id="{B92091F5-C47A-429D-BA52-1137D68E47E4}"/>
               </a:ext>
             </a:extLst>
           </p:cNvPr>
@@ -4083,7 +4083,7 @@
           <p:cNvPr id="17" name="">
             <a:extLst xmlns:a="http://schemas.openxmlformats.org/drawingml/2006/main">
               <a:ext uri="{FF2B5EF4-FFF2-40B4-BE49-F238E27FC236}">
-                <a16:creationId xmlns:a16="http://schemas.microsoft.com/office/drawing/2014/main" id="{18BF5B06-7657-4A5B-AD41-06F29A699626}"/>
+                <a16:creationId xmlns:a16="http://schemas.microsoft.com/office/drawing/2014/main" id="{D9B479BA-3A5E-40BB-B6F6-E8CB9886046D}"/>
               </a:ext>
             </a:extLst>
           </p:cNvPr>
@@ -4140,7 +4140,7 @@
           <p:cNvPr id="18" name="">
             <a:extLst xmlns:a="http://schemas.openxmlformats.org/drawingml/2006/main">
               <a:ext uri="{FF2B5EF4-FFF2-40B4-BE49-F238E27FC236}">
-                <a16:creationId xmlns:a16="http://schemas.microsoft.com/office/drawing/2014/main" id="{4B213337-479D-4F5A-B8A7-20E3F5C8488A}"/>
+                <a16:creationId xmlns:a16="http://schemas.microsoft.com/office/drawing/2014/main" id="{DE458371-B93B-4C89-ACE1-48C74F227DD8}"/>
               </a:ext>
             </a:extLst>
           </p:cNvPr>
@@ -4195,7 +4195,7 @@
     </p:spTree>
     <p:extLst>
       <p:ext uri="{BB962C8B-B14F-4D97-AF65-F5344CB8AC3E}">
-        <p14:creationId xmlns:p14="http://schemas.microsoft.com/office/powerpoint/2010/main" val="1558656720"/>
+        <p14:creationId xmlns:p14="http://schemas.microsoft.com/office/powerpoint/2010/main" val="1443879815"/>
       </p:ext>
     </p:extLst>
   </p:cSld>
@@ -4350,7 +4350,7 @@
           <p:cNvPr id="23" name="">
             <a:extLst xmlns:a="http://schemas.openxmlformats.org/drawingml/2006/main">
               <a:ext uri="{FF2B5EF4-FFF2-40B4-BE49-F238E27FC236}">
-                <a16:creationId xmlns:a16="http://schemas.microsoft.com/office/drawing/2014/main" id="{19295457-434F-4694-BF53-139AC72D1825}"/>
+                <a16:creationId xmlns:a16="http://schemas.microsoft.com/office/drawing/2014/main" id="{62D73D80-4663-4134-9CE2-25A0827557A7}"/>
               </a:ext>
             </a:extLst>
           </p:cNvPr>
@@ -4382,7 +4382,7 @@
           <p:cNvPr id="2" name="">
             <a:extLst xmlns:a="http://schemas.openxmlformats.org/drawingml/2006/main">
               <a:ext uri="{FF2B5EF4-FFF2-40B4-BE49-F238E27FC236}">
-                <a16:creationId xmlns:a16="http://schemas.microsoft.com/office/drawing/2014/main" id="{94F9423F-C875-43C1-A2DB-5AF72A634F62}"/>
+                <a16:creationId xmlns:a16="http://schemas.microsoft.com/office/drawing/2014/main" id="{1F627900-F602-438B-93F6-E5589941504C}"/>
               </a:ext>
             </a:extLst>
           </p:cNvPr>
@@ -4439,7 +4439,7 @@
           <p:cNvPr id="3" name="">
             <a:extLst xmlns:a="http://schemas.openxmlformats.org/drawingml/2006/main">
               <a:ext uri="{FF2B5EF4-FFF2-40B4-BE49-F238E27FC236}">
-                <a16:creationId xmlns:a16="http://schemas.microsoft.com/office/drawing/2014/main" id="{E64A18D8-9BF0-4227-945F-104AC13E46EA}"/>
+                <a16:creationId xmlns:a16="http://schemas.microsoft.com/office/drawing/2014/main" id="{101D64E2-8162-458E-AD45-2AEC7075C0C9}"/>
               </a:ext>
             </a:extLst>
           </p:cNvPr>
@@ -4471,7 +4471,7 @@
           <p:cNvPr id="4" name="">
             <a:extLst xmlns:a="http://schemas.openxmlformats.org/drawingml/2006/main">
               <a:ext uri="{FF2B5EF4-FFF2-40B4-BE49-F238E27FC236}">
-                <a16:creationId xmlns:a16="http://schemas.microsoft.com/office/drawing/2014/main" id="{3B4F9E76-5E91-4456-80F0-CE4CF2D1016B}"/>
+                <a16:creationId xmlns:a16="http://schemas.microsoft.com/office/drawing/2014/main" id="{20502A81-051A-4D6C-84CD-B3F299176175}"/>
               </a:ext>
             </a:extLst>
           </p:cNvPr>
@@ -4528,7 +4528,7 @@
           <p:cNvPr id="5" name="">
             <a:extLst xmlns:a="http://schemas.openxmlformats.org/drawingml/2006/main">
               <a:ext uri="{FF2B5EF4-FFF2-40B4-BE49-F238E27FC236}">
-                <a16:creationId xmlns:a16="http://schemas.microsoft.com/office/drawing/2014/main" id="{F2D6A7E5-74BD-4D88-978E-F2F1DC588E08}"/>
+                <a16:creationId xmlns:a16="http://schemas.microsoft.com/office/drawing/2014/main" id="{0C7BE706-E691-4324-864E-C4A23B2580E4}"/>
               </a:ext>
             </a:extLst>
           </p:cNvPr>
@@ -4585,7 +4585,7 @@
           <p:cNvPr id="6" name="">
             <a:extLst xmlns:a="http://schemas.openxmlformats.org/drawingml/2006/main">
               <a:ext uri="{FF2B5EF4-FFF2-40B4-BE49-F238E27FC236}">
-                <a16:creationId xmlns:a16="http://schemas.microsoft.com/office/drawing/2014/main" id="{09A3CD74-4ED2-4C2A-80BC-1772CDF1F4A9}"/>
+                <a16:creationId xmlns:a16="http://schemas.microsoft.com/office/drawing/2014/main" id="{62F47C8E-34BA-4BC0-8A7D-0BA77FCB68F5}"/>
               </a:ext>
             </a:extLst>
           </p:cNvPr>
@@ -4642,7 +4642,7 @@
           <p:cNvPr id="7" name="">
             <a:extLst xmlns:a="http://schemas.openxmlformats.org/drawingml/2006/main">
               <a:ext uri="{FF2B5EF4-FFF2-40B4-BE49-F238E27FC236}">
-                <a16:creationId xmlns:a16="http://schemas.microsoft.com/office/drawing/2014/main" id="{58EA4CE5-81A9-43C4-A3F0-F7FE1A441235}"/>
+                <a16:creationId xmlns:a16="http://schemas.microsoft.com/office/drawing/2014/main" id="{FD7CF5A1-C7E7-4A2F-A2CB-700ED5E52B49}"/>
               </a:ext>
             </a:extLst>
           </p:cNvPr>
@@ -4674,7 +4674,7 @@
           <p:cNvPr id="8" name="">
             <a:extLst xmlns:a="http://schemas.openxmlformats.org/drawingml/2006/main">
               <a:ext uri="{FF2B5EF4-FFF2-40B4-BE49-F238E27FC236}">
-                <a16:creationId xmlns:a16="http://schemas.microsoft.com/office/drawing/2014/main" id="{B0C43650-0A77-46E8-87F9-633760D42F6A}"/>
+                <a16:creationId xmlns:a16="http://schemas.microsoft.com/office/drawing/2014/main" id="{EAA946E9-5899-4931-BAC5-FD3985903DE4}"/>
               </a:ext>
             </a:extLst>
           </p:cNvPr>
@@ -4731,7 +4731,7 @@
           <p:cNvPr id="9" name="">
             <a:extLst xmlns:a="http://schemas.openxmlformats.org/drawingml/2006/main">
               <a:ext uri="{FF2B5EF4-FFF2-40B4-BE49-F238E27FC236}">
-                <a16:creationId xmlns:a16="http://schemas.microsoft.com/office/drawing/2014/main" id="{3AC0DCBA-5D2E-4AE8-B436-6B1E1D371622}"/>
+                <a16:creationId xmlns:a16="http://schemas.microsoft.com/office/drawing/2014/main" id="{A394581A-B830-475D-92FA-A498B2F67FBC}"/>
               </a:ext>
             </a:extLst>
           </p:cNvPr>
@@ -4788,7 +4788,7 @@
           <p:cNvPr id="10" name="">
             <a:extLst xmlns:a="http://schemas.openxmlformats.org/drawingml/2006/main">
               <a:ext uri="{FF2B5EF4-FFF2-40B4-BE49-F238E27FC236}">
-                <a16:creationId xmlns:a16="http://schemas.microsoft.com/office/drawing/2014/main" id="{D64824F1-928C-4E2F-9177-D78EF9A36F4D}"/>
+                <a16:creationId xmlns:a16="http://schemas.microsoft.com/office/drawing/2014/main" id="{ACAB743C-04F6-45B5-A008-C65A516DE1C1}"/>
               </a:ext>
             </a:extLst>
           </p:cNvPr>
@@ -4822,7 +4822,7 @@
           <p:cNvPr id="11" name="">
             <a:extLst xmlns:a="http://schemas.openxmlformats.org/drawingml/2006/main">
               <a:ext uri="{FF2B5EF4-FFF2-40B4-BE49-F238E27FC236}">
-                <a16:creationId xmlns:a16="http://schemas.microsoft.com/office/drawing/2014/main" id="{EC153B4C-BCB5-4876-8BF1-6599B5E2DFD4}"/>
+                <a16:creationId xmlns:a16="http://schemas.microsoft.com/office/drawing/2014/main" id="{36D03750-B515-4EED-AE8F-5D7F1CD2B1B1}"/>
               </a:ext>
             </a:extLst>
           </p:cNvPr>
@@ -4854,7 +4854,7 @@
           <p:cNvPr id="12" name="">
             <a:extLst xmlns:a="http://schemas.openxmlformats.org/drawingml/2006/main">
               <a:ext uri="{FF2B5EF4-FFF2-40B4-BE49-F238E27FC236}">
-                <a16:creationId xmlns:a16="http://schemas.microsoft.com/office/drawing/2014/main" id="{40EACB84-F65F-43D3-8828-AABE772F3EE9}"/>
+                <a16:creationId xmlns:a16="http://schemas.microsoft.com/office/drawing/2014/main" id="{913A326E-CEA1-45D3-B67D-6690BBFBE53E}"/>
               </a:ext>
             </a:extLst>
           </p:cNvPr>
@@ -4911,7 +4911,7 @@
           <p:cNvPr id="13" name="">
             <a:extLst xmlns:a="http://schemas.openxmlformats.org/drawingml/2006/main">
               <a:ext uri="{FF2B5EF4-FFF2-40B4-BE49-F238E27FC236}">
-                <a16:creationId xmlns:a16="http://schemas.microsoft.com/office/drawing/2014/main" id="{23F426A1-3127-4EB2-AD36-77E3E1FE0137}"/>
+                <a16:creationId xmlns:a16="http://schemas.microsoft.com/office/drawing/2014/main" id="{28F9E8DC-A766-4B82-ADAA-686ED76BE5D2}"/>
               </a:ext>
             </a:extLst>
           </p:cNvPr>
@@ -4968,7 +4968,7 @@
           <p:cNvPr id="14" name="">
             <a:extLst xmlns:a="http://schemas.openxmlformats.org/drawingml/2006/main">
               <a:ext uri="{FF2B5EF4-FFF2-40B4-BE49-F238E27FC236}">
-                <a16:creationId xmlns:a16="http://schemas.microsoft.com/office/drawing/2014/main" id="{7A31D4FC-2329-4323-81ED-239D08A70D68}"/>
+                <a16:creationId xmlns:a16="http://schemas.microsoft.com/office/drawing/2014/main" id="{781C5F53-23FB-411F-B27D-CC5E41CA986F}"/>
               </a:ext>
             </a:extLst>
           </p:cNvPr>
@@ -5002,7 +5002,7 @@
           <p:cNvPr id="15" name="">
             <a:extLst xmlns:a="http://schemas.openxmlformats.org/drawingml/2006/main">
               <a:ext uri="{FF2B5EF4-FFF2-40B4-BE49-F238E27FC236}">
-                <a16:creationId xmlns:a16="http://schemas.microsoft.com/office/drawing/2014/main" id="{EECA749E-BC0F-417C-81AD-6D0A4D72075C}"/>
+                <a16:creationId xmlns:a16="http://schemas.microsoft.com/office/drawing/2014/main" id="{4427C227-81DF-4A52-ADFA-7A8E8D8490FF}"/>
               </a:ext>
             </a:extLst>
           </p:cNvPr>
@@ -5034,7 +5034,7 @@
           <p:cNvPr id="16" name="">
             <a:extLst xmlns:a="http://schemas.openxmlformats.org/drawingml/2006/main">
               <a:ext uri="{FF2B5EF4-FFF2-40B4-BE49-F238E27FC236}">
-                <a16:creationId xmlns:a16="http://schemas.microsoft.com/office/drawing/2014/main" id="{3D54B3EA-5F4F-402F-9F25-9357BDFFF4A4}"/>
+                <a16:creationId xmlns:a16="http://schemas.microsoft.com/office/drawing/2014/main" id="{0D8B5E81-BD20-4C71-9434-23A3798FB5E6}"/>
               </a:ext>
             </a:extLst>
           </p:cNvPr>
@@ -5091,7 +5091,7 @@
           <p:cNvPr id="17" name="">
             <a:extLst xmlns:a="http://schemas.openxmlformats.org/drawingml/2006/main">
               <a:ext uri="{FF2B5EF4-FFF2-40B4-BE49-F238E27FC236}">
-                <a16:creationId xmlns:a16="http://schemas.microsoft.com/office/drawing/2014/main" id="{702A6C0B-3CCB-4E24-926C-62BD134496F0}"/>
+                <a16:creationId xmlns:a16="http://schemas.microsoft.com/office/drawing/2014/main" id="{CF5EE049-2E20-4B5D-8B98-301E424F2CAD}"/>
               </a:ext>
             </a:extLst>
           </p:cNvPr>
@@ -5148,7 +5148,7 @@
           <p:cNvPr id="18" name="">
             <a:extLst xmlns:a="http://schemas.openxmlformats.org/drawingml/2006/main">
               <a:ext uri="{FF2B5EF4-FFF2-40B4-BE49-F238E27FC236}">
-                <a16:creationId xmlns:a16="http://schemas.microsoft.com/office/drawing/2014/main" id="{E186B00C-5BAC-4D80-BDFD-D232A8C03CB2}"/>
+                <a16:creationId xmlns:a16="http://schemas.microsoft.com/office/drawing/2014/main" id="{541EA818-FC5B-4997-B762-3D0E8A69B463}"/>
               </a:ext>
             </a:extLst>
           </p:cNvPr>
@@ -5182,7 +5182,7 @@
           <p:cNvPr id="19" name="">
             <a:extLst xmlns:a="http://schemas.openxmlformats.org/drawingml/2006/main">
               <a:ext uri="{FF2B5EF4-FFF2-40B4-BE49-F238E27FC236}">
-                <a16:creationId xmlns:a16="http://schemas.microsoft.com/office/drawing/2014/main" id="{5B75C791-09A0-490E-8C4F-710FCDC390F9}"/>
+                <a16:creationId xmlns:a16="http://schemas.microsoft.com/office/drawing/2014/main" id="{A5F18C42-FF96-44A3-9092-B2E91745AE00}"/>
               </a:ext>
             </a:extLst>
           </p:cNvPr>
@@ -5214,7 +5214,7 @@
           <p:cNvPr id="20" name="">
             <a:extLst xmlns:a="http://schemas.openxmlformats.org/drawingml/2006/main">
               <a:ext uri="{FF2B5EF4-FFF2-40B4-BE49-F238E27FC236}">
-                <a16:creationId xmlns:a16="http://schemas.microsoft.com/office/drawing/2014/main" id="{53E31028-1BF6-4233-ACF1-572EEB7408CD}"/>
+                <a16:creationId xmlns:a16="http://schemas.microsoft.com/office/drawing/2014/main" id="{2E59B36D-A0F4-4044-B11F-7EB9E321F4A6}"/>
               </a:ext>
             </a:extLst>
           </p:cNvPr>
@@ -5271,7 +5271,7 @@
           <p:cNvPr id="21" name="">
             <a:extLst xmlns:a="http://schemas.openxmlformats.org/drawingml/2006/main">
               <a:ext uri="{FF2B5EF4-FFF2-40B4-BE49-F238E27FC236}">
-                <a16:creationId xmlns:a16="http://schemas.microsoft.com/office/drawing/2014/main" id="{07870BA0-1D5E-4C78-B2CB-5D42F7756E9C}"/>
+                <a16:creationId xmlns:a16="http://schemas.microsoft.com/office/drawing/2014/main" id="{FC2F849D-BE46-4C31-90E1-721930AC6BF7}"/>
               </a:ext>
             </a:extLst>
           </p:cNvPr>
@@ -5328,7 +5328,7 @@
           <p:cNvPr id="22" name="">
             <a:extLst xmlns:a="http://schemas.openxmlformats.org/drawingml/2006/main">
               <a:ext uri="{FF2B5EF4-FFF2-40B4-BE49-F238E27FC236}">
-                <a16:creationId xmlns:a16="http://schemas.microsoft.com/office/drawing/2014/main" id="{B5378F87-60B0-4924-A9BB-D35499BF25B5}"/>
+                <a16:creationId xmlns:a16="http://schemas.microsoft.com/office/drawing/2014/main" id="{9E942DA7-FCCE-4456-AB69-DABEBF99E70A}"/>
               </a:ext>
             </a:extLst>
           </p:cNvPr>
@@ -5383,7 +5383,7 @@
     </p:spTree>
     <p:extLst>
       <p:ext uri="{BB962C8B-B14F-4D97-AF65-F5344CB8AC3E}">
-        <p14:creationId xmlns:p14="http://schemas.microsoft.com/office/powerpoint/2010/main" val="1737844503"/>
+        <p14:creationId xmlns:p14="http://schemas.microsoft.com/office/powerpoint/2010/main" val="836849922"/>
       </p:ext>
     </p:extLst>
   </p:cSld>
@@ -5584,7 +5584,7 @@
           <p:cNvPr id="23" name="">
             <a:extLst xmlns:a="http://schemas.openxmlformats.org/drawingml/2006/main">
               <a:ext uri="{FF2B5EF4-FFF2-40B4-BE49-F238E27FC236}">
-                <a16:creationId xmlns:a16="http://schemas.microsoft.com/office/drawing/2014/main" id="{FB813519-AFB6-4787-A20D-3E897A59C5A7}"/>
+                <a16:creationId xmlns:a16="http://schemas.microsoft.com/office/drawing/2014/main" id="{1D70196F-2B28-42F6-9A37-5B4B949BB341}"/>
               </a:ext>
             </a:extLst>
           </p:cNvPr>
@@ -5616,7 +5616,7 @@
           <p:cNvPr id="2" name="">
             <a:extLst xmlns:a="http://schemas.openxmlformats.org/drawingml/2006/main">
               <a:ext uri="{FF2B5EF4-FFF2-40B4-BE49-F238E27FC236}">
-                <a16:creationId xmlns:a16="http://schemas.microsoft.com/office/drawing/2014/main" id="{8DB54444-B3A4-4789-8B6A-6448667F9CDA}"/>
+                <a16:creationId xmlns:a16="http://schemas.microsoft.com/office/drawing/2014/main" id="{A7B54BEF-4F68-4F4A-9903-E153B0114379}"/>
               </a:ext>
             </a:extLst>
           </p:cNvPr>
@@ -5673,7 +5673,7 @@
           <p:cNvPr id="3" name="">
             <a:extLst xmlns:a="http://schemas.openxmlformats.org/drawingml/2006/main">
               <a:ext uri="{FF2B5EF4-FFF2-40B4-BE49-F238E27FC236}">
-                <a16:creationId xmlns:a16="http://schemas.microsoft.com/office/drawing/2014/main" id="{64ED6EC4-114B-418C-B247-BEADCF321F9A}"/>
+                <a16:creationId xmlns:a16="http://schemas.microsoft.com/office/drawing/2014/main" id="{BC10D127-CD53-46EF-969E-CC9154682C2E}"/>
               </a:ext>
             </a:extLst>
           </p:cNvPr>
@@ -5705,7 +5705,7 @@
           <p:cNvPr id="4" name="">
             <a:extLst xmlns:a="http://schemas.openxmlformats.org/drawingml/2006/main">
               <a:ext uri="{FF2B5EF4-FFF2-40B4-BE49-F238E27FC236}">
-                <a16:creationId xmlns:a16="http://schemas.microsoft.com/office/drawing/2014/main" id="{BA057C8B-125A-4A20-A21F-B86B56073CE3}"/>
+                <a16:creationId xmlns:a16="http://schemas.microsoft.com/office/drawing/2014/main" id="{18096945-58CE-4606-92C4-5A8A88B6D637}"/>
               </a:ext>
             </a:extLst>
           </p:cNvPr>
@@ -5762,7 +5762,7 @@
           <p:cNvPr id="5" name="">
             <a:extLst xmlns:a="http://schemas.openxmlformats.org/drawingml/2006/main">
               <a:ext uri="{FF2B5EF4-FFF2-40B4-BE49-F238E27FC236}">
-                <a16:creationId xmlns:a16="http://schemas.microsoft.com/office/drawing/2014/main" id="{E7F23E17-3DFA-4CEB-B661-E99519B08D58}"/>
+                <a16:creationId xmlns:a16="http://schemas.microsoft.com/office/drawing/2014/main" id="{D71CEB6E-A740-4DF4-8714-28EE2C6570E0}"/>
               </a:ext>
             </a:extLst>
           </p:cNvPr>
@@ -5819,7 +5819,7 @@
           <p:cNvPr id="6" name="">
             <a:extLst xmlns:a="http://schemas.openxmlformats.org/drawingml/2006/main">
               <a:ext uri="{FF2B5EF4-FFF2-40B4-BE49-F238E27FC236}">
-                <a16:creationId xmlns:a16="http://schemas.microsoft.com/office/drawing/2014/main" id="{A5E6DEA3-5038-408C-B97F-DAB3E7A69CB8}"/>
+                <a16:creationId xmlns:a16="http://schemas.microsoft.com/office/drawing/2014/main" id="{B172226C-0967-4B0C-A02D-132FA35E0276}"/>
               </a:ext>
             </a:extLst>
           </p:cNvPr>
@@ -5876,7 +5876,7 @@
           <p:cNvPr id="7" name="">
             <a:extLst xmlns:a="http://schemas.openxmlformats.org/drawingml/2006/main">
               <a:ext uri="{FF2B5EF4-FFF2-40B4-BE49-F238E27FC236}">
-                <a16:creationId xmlns:a16="http://schemas.microsoft.com/office/drawing/2014/main" id="{AC9641E2-E951-4A87-ACF2-8ED793493723}"/>
+                <a16:creationId xmlns:a16="http://schemas.microsoft.com/office/drawing/2014/main" id="{D15D07C3-53D1-4101-9EBB-98673C9221B2}"/>
               </a:ext>
             </a:extLst>
           </p:cNvPr>
@@ -5908,7 +5908,7 @@
           <p:cNvPr id="8" name="">
             <a:extLst xmlns:a="http://schemas.openxmlformats.org/drawingml/2006/main">
               <a:ext uri="{FF2B5EF4-FFF2-40B4-BE49-F238E27FC236}">
-                <a16:creationId xmlns:a16="http://schemas.microsoft.com/office/drawing/2014/main" id="{5A64A2BA-979A-4490-9A3E-2D5D0A19A3C2}"/>
+                <a16:creationId xmlns:a16="http://schemas.microsoft.com/office/drawing/2014/main" id="{27CFC9F8-7C29-43F8-872E-6EC583A39285}"/>
               </a:ext>
             </a:extLst>
           </p:cNvPr>
@@ -5965,7 +5965,7 @@
           <p:cNvPr id="9" name="">
             <a:extLst xmlns:a="http://schemas.openxmlformats.org/drawingml/2006/main">
               <a:ext uri="{FF2B5EF4-FFF2-40B4-BE49-F238E27FC236}">
-                <a16:creationId xmlns:a16="http://schemas.microsoft.com/office/drawing/2014/main" id="{EF788BD5-F93E-4198-817A-92716CBA0D2A}"/>
+                <a16:creationId xmlns:a16="http://schemas.microsoft.com/office/drawing/2014/main" id="{9967B96D-7C73-4E40-B80D-C240CD721D2A}"/>
               </a:ext>
             </a:extLst>
           </p:cNvPr>
@@ -6022,7 +6022,7 @@
           <p:cNvPr id="10" name="">
             <a:extLst xmlns:a="http://schemas.openxmlformats.org/drawingml/2006/main">
               <a:ext uri="{FF2B5EF4-FFF2-40B4-BE49-F238E27FC236}">
-                <a16:creationId xmlns:a16="http://schemas.microsoft.com/office/drawing/2014/main" id="{D926D8C9-EC31-41B4-ABF7-1F0DE12B1F21}"/>
+                <a16:creationId xmlns:a16="http://schemas.microsoft.com/office/drawing/2014/main" id="{B50542C5-A4E9-4230-A258-1DEEF4F4FBDB}"/>
               </a:ext>
             </a:extLst>
           </p:cNvPr>
@@ -6056,7 +6056,7 @@
           <p:cNvPr id="11" name="">
             <a:extLst xmlns:a="http://schemas.openxmlformats.org/drawingml/2006/main">
               <a:ext uri="{FF2B5EF4-FFF2-40B4-BE49-F238E27FC236}">
-                <a16:creationId xmlns:a16="http://schemas.microsoft.com/office/drawing/2014/main" id="{251205F7-3A78-4629-9FE4-554BB0A9B30C}"/>
+                <a16:creationId xmlns:a16="http://schemas.microsoft.com/office/drawing/2014/main" id="{0D33B1FA-26AA-4700-9C94-F0AC1D235C1E}"/>
               </a:ext>
             </a:extLst>
           </p:cNvPr>
@@ -6088,7 +6088,7 @@
           <p:cNvPr id="12" name="">
             <a:extLst xmlns:a="http://schemas.openxmlformats.org/drawingml/2006/main">
               <a:ext uri="{FF2B5EF4-FFF2-40B4-BE49-F238E27FC236}">
-                <a16:creationId xmlns:a16="http://schemas.microsoft.com/office/drawing/2014/main" id="{B322AFAA-E04E-4F20-90C8-2CBEA227A37B}"/>
+                <a16:creationId xmlns:a16="http://schemas.microsoft.com/office/drawing/2014/main" id="{45E7EF71-8BA6-4262-A43C-8E874304D54D}"/>
               </a:ext>
             </a:extLst>
           </p:cNvPr>
@@ -6145,7 +6145,7 @@
           <p:cNvPr id="13" name="">
             <a:extLst xmlns:a="http://schemas.openxmlformats.org/drawingml/2006/main">
               <a:ext uri="{FF2B5EF4-FFF2-40B4-BE49-F238E27FC236}">
-                <a16:creationId xmlns:a16="http://schemas.microsoft.com/office/drawing/2014/main" id="{D2B29CEE-4D90-4078-9208-EA6CC1EA84EF}"/>
+                <a16:creationId xmlns:a16="http://schemas.microsoft.com/office/drawing/2014/main" id="{2107FD0F-C627-4126-8578-154EA55D852F}"/>
               </a:ext>
             </a:extLst>
           </p:cNvPr>
@@ -6202,7 +6202,7 @@
           <p:cNvPr id="14" name="">
             <a:extLst xmlns:a="http://schemas.openxmlformats.org/drawingml/2006/main">
               <a:ext uri="{FF2B5EF4-FFF2-40B4-BE49-F238E27FC236}">
-                <a16:creationId xmlns:a16="http://schemas.microsoft.com/office/drawing/2014/main" id="{2CE88635-8C5A-45B6-A12C-702541E109D7}"/>
+                <a16:creationId xmlns:a16="http://schemas.microsoft.com/office/drawing/2014/main" id="{B51553CF-E204-4BF1-ABF7-77C9D4BF3787}"/>
               </a:ext>
             </a:extLst>
           </p:cNvPr>
@@ -6236,7 +6236,7 @@
           <p:cNvPr id="15" name="">
             <a:extLst xmlns:a="http://schemas.openxmlformats.org/drawingml/2006/main">
               <a:ext uri="{FF2B5EF4-FFF2-40B4-BE49-F238E27FC236}">
-                <a16:creationId xmlns:a16="http://schemas.microsoft.com/office/drawing/2014/main" id="{10612D3F-A177-47BA-A160-7FDA02B254FC}"/>
+                <a16:creationId xmlns:a16="http://schemas.microsoft.com/office/drawing/2014/main" id="{D2BAD7F6-3F01-4129-AEF4-E2C56BA7A9E6}"/>
               </a:ext>
             </a:extLst>
           </p:cNvPr>
@@ -6268,7 +6268,7 @@
           <p:cNvPr id="16" name="">
             <a:extLst xmlns:a="http://schemas.openxmlformats.org/drawingml/2006/main">
               <a:ext uri="{FF2B5EF4-FFF2-40B4-BE49-F238E27FC236}">
-                <a16:creationId xmlns:a16="http://schemas.microsoft.com/office/drawing/2014/main" id="{48C16FA3-773F-4401-9785-A08FF058A68B}"/>
+                <a16:creationId xmlns:a16="http://schemas.microsoft.com/office/drawing/2014/main" id="{80298F5E-91D2-4E7B-A92D-905CC0146D5F}"/>
               </a:ext>
             </a:extLst>
           </p:cNvPr>
@@ -6325,7 +6325,7 @@
           <p:cNvPr id="17" name="">
             <a:extLst xmlns:a="http://schemas.openxmlformats.org/drawingml/2006/main">
               <a:ext uri="{FF2B5EF4-FFF2-40B4-BE49-F238E27FC236}">
-                <a16:creationId xmlns:a16="http://schemas.microsoft.com/office/drawing/2014/main" id="{258D4178-092F-4E0E-966F-1636C0A96118}"/>
+                <a16:creationId xmlns:a16="http://schemas.microsoft.com/office/drawing/2014/main" id="{059B4FBB-A749-4853-A2A9-DBC9C3806A8B}"/>
               </a:ext>
             </a:extLst>
           </p:cNvPr>
@@ -6382,7 +6382,7 @@
           <p:cNvPr id="18" name="">
             <a:extLst xmlns:a="http://schemas.openxmlformats.org/drawingml/2006/main">
               <a:ext uri="{FF2B5EF4-FFF2-40B4-BE49-F238E27FC236}">
-                <a16:creationId xmlns:a16="http://schemas.microsoft.com/office/drawing/2014/main" id="{7D5EDF0D-A851-4438-9B3A-6929C6B7AF0F}"/>
+                <a16:creationId xmlns:a16="http://schemas.microsoft.com/office/drawing/2014/main" id="{5257B2C2-AB84-41EA-A617-06C588200670}"/>
               </a:ext>
             </a:extLst>
           </p:cNvPr>
@@ -6416,7 +6416,7 @@
           <p:cNvPr id="19" name="">
             <a:extLst xmlns:a="http://schemas.openxmlformats.org/drawingml/2006/main">
               <a:ext uri="{FF2B5EF4-FFF2-40B4-BE49-F238E27FC236}">
-                <a16:creationId xmlns:a16="http://schemas.microsoft.com/office/drawing/2014/main" id="{030808C9-E327-4C14-9BC3-0FF32EF96425}"/>
+                <a16:creationId xmlns:a16="http://schemas.microsoft.com/office/drawing/2014/main" id="{549D1B58-8211-4D76-9968-B74116740CC8}"/>
               </a:ext>
             </a:extLst>
           </p:cNvPr>
@@ -6448,7 +6448,7 @@
           <p:cNvPr id="20" name="">
             <a:extLst xmlns:a="http://schemas.openxmlformats.org/drawingml/2006/main">
               <a:ext uri="{FF2B5EF4-FFF2-40B4-BE49-F238E27FC236}">
-                <a16:creationId xmlns:a16="http://schemas.microsoft.com/office/drawing/2014/main" id="{61511BC8-235A-4851-9DEE-2D3098A1D377}"/>
+                <a16:creationId xmlns:a16="http://schemas.microsoft.com/office/drawing/2014/main" id="{830FAC21-0C59-4A26-8809-EB445C9F479E}"/>
               </a:ext>
             </a:extLst>
           </p:cNvPr>
@@ -6505,7 +6505,7 @@
           <p:cNvPr id="21" name="">
             <a:extLst xmlns:a="http://schemas.openxmlformats.org/drawingml/2006/main">
               <a:ext uri="{FF2B5EF4-FFF2-40B4-BE49-F238E27FC236}">
-                <a16:creationId xmlns:a16="http://schemas.microsoft.com/office/drawing/2014/main" id="{F0C22239-DCFD-4A1E-A9E4-E40400ABB133}"/>
+                <a16:creationId xmlns:a16="http://schemas.microsoft.com/office/drawing/2014/main" id="{8D915EDA-4CB1-495D-B597-130F51DBDBF1}"/>
               </a:ext>
             </a:extLst>
           </p:cNvPr>
@@ -6562,7 +6562,7 @@
           <p:cNvPr id="22" name="">
             <a:extLst xmlns:a="http://schemas.openxmlformats.org/drawingml/2006/main">
               <a:ext uri="{FF2B5EF4-FFF2-40B4-BE49-F238E27FC236}">
-                <a16:creationId xmlns:a16="http://schemas.microsoft.com/office/drawing/2014/main" id="{B30A6171-7BDB-4482-ACE4-935083AAA7F1}"/>
+                <a16:creationId xmlns:a16="http://schemas.microsoft.com/office/drawing/2014/main" id="{F90E18DA-BEF0-40A0-824D-A8FA6F987735}"/>
               </a:ext>
             </a:extLst>
           </p:cNvPr>
@@ -6617,7 +6617,7 @@
     </p:spTree>
     <p:extLst>
       <p:ext uri="{BB962C8B-B14F-4D97-AF65-F5344CB8AC3E}">
-        <p14:creationId xmlns:p14="http://schemas.microsoft.com/office/powerpoint/2010/main" val="222336361"/>
+        <p14:creationId xmlns:p14="http://schemas.microsoft.com/office/powerpoint/2010/main" val="2057137511"/>
       </p:ext>
     </p:extLst>
   </p:cSld>
@@ -6818,7 +6818,7 @@
           <p:cNvPr id="16" name="">
             <a:extLst xmlns:a="http://schemas.openxmlformats.org/drawingml/2006/main">
               <a:ext uri="{FF2B5EF4-FFF2-40B4-BE49-F238E27FC236}">
-                <a16:creationId xmlns:a16="http://schemas.microsoft.com/office/drawing/2014/main" id="{378B5BAA-EC4E-460A-A591-969E819E69DD}"/>
+                <a16:creationId xmlns:a16="http://schemas.microsoft.com/office/drawing/2014/main" id="{86646E31-95F8-45D6-B525-815D4C0C71AA}"/>
               </a:ext>
             </a:extLst>
           </p:cNvPr>
@@ -6850,7 +6850,7 @@
           <p:cNvPr id="2" name="">
             <a:extLst xmlns:a="http://schemas.openxmlformats.org/drawingml/2006/main">
               <a:ext uri="{FF2B5EF4-FFF2-40B4-BE49-F238E27FC236}">
-                <a16:creationId xmlns:a16="http://schemas.microsoft.com/office/drawing/2014/main" id="{867A44B8-7990-49C1-B53D-74C775FFBFCF}"/>
+                <a16:creationId xmlns:a16="http://schemas.microsoft.com/office/drawing/2014/main" id="{EB2446A9-0D80-4FD1-AF76-3AF3231FAD84}"/>
               </a:ext>
             </a:extLst>
           </p:cNvPr>
@@ -6907,7 +6907,7 @@
           <p:cNvPr id="3" name="">
             <a:extLst xmlns:a="http://schemas.openxmlformats.org/drawingml/2006/main">
               <a:ext uri="{FF2B5EF4-FFF2-40B4-BE49-F238E27FC236}">
-                <a16:creationId xmlns:a16="http://schemas.microsoft.com/office/drawing/2014/main" id="{94276C8B-8527-442F-90D8-C21D050058AA}"/>
+                <a16:creationId xmlns:a16="http://schemas.microsoft.com/office/drawing/2014/main" id="{C772965D-4327-4770-9010-4D2F3D0AE2D0}"/>
               </a:ext>
             </a:extLst>
           </p:cNvPr>
@@ -6939,7 +6939,7 @@
           <p:cNvPr id="4" name="">
             <a:extLst xmlns:a="http://schemas.openxmlformats.org/drawingml/2006/main">
               <a:ext uri="{FF2B5EF4-FFF2-40B4-BE49-F238E27FC236}">
-                <a16:creationId xmlns:a16="http://schemas.microsoft.com/office/drawing/2014/main" id="{1B0AF48D-A77D-434D-8F56-CD70F733335A}"/>
+                <a16:creationId xmlns:a16="http://schemas.microsoft.com/office/drawing/2014/main" id="{568B4A55-4AF6-4550-AB2C-7C46C61F98FD}"/>
               </a:ext>
             </a:extLst>
           </p:cNvPr>
@@ -6996,7 +6996,7 @@
           <p:cNvPr id="5" name="">
             <a:extLst xmlns:a="http://schemas.openxmlformats.org/drawingml/2006/main">
               <a:ext uri="{FF2B5EF4-FFF2-40B4-BE49-F238E27FC236}">
-                <a16:creationId xmlns:a16="http://schemas.microsoft.com/office/drawing/2014/main" id="{F22F0E55-66DC-408F-A74B-77D2574FFB88}"/>
+                <a16:creationId xmlns:a16="http://schemas.microsoft.com/office/drawing/2014/main" id="{3A2350B4-3D92-4FE6-BDE8-10A83915E50F}"/>
               </a:ext>
             </a:extLst>
           </p:cNvPr>
@@ -7053,7 +7053,7 @@
           <p:cNvPr id="6" name="">
             <a:extLst xmlns:a="http://schemas.openxmlformats.org/drawingml/2006/main">
               <a:ext uri="{FF2B5EF4-FFF2-40B4-BE49-F238E27FC236}">
-                <a16:creationId xmlns:a16="http://schemas.microsoft.com/office/drawing/2014/main" id="{52EFBD49-ACEE-406F-8D9F-829CB00E70B3}"/>
+                <a16:creationId xmlns:a16="http://schemas.microsoft.com/office/drawing/2014/main" id="{C6E9DEB0-8D9B-4872-9BBE-F6B5996BCEE6}"/>
               </a:ext>
             </a:extLst>
           </p:cNvPr>
@@ -7110,7 +7110,7 @@
           <p:cNvPr id="7" name="">
             <a:extLst xmlns:a="http://schemas.openxmlformats.org/drawingml/2006/main">
               <a:ext uri="{FF2B5EF4-FFF2-40B4-BE49-F238E27FC236}">
-                <a16:creationId xmlns:a16="http://schemas.microsoft.com/office/drawing/2014/main" id="{BFF8DA82-007E-4A88-92EC-1975EB03AA10}"/>
+                <a16:creationId xmlns:a16="http://schemas.microsoft.com/office/drawing/2014/main" id="{549F6BA8-0379-4EB6-BD74-8429FEE0C4EC}"/>
               </a:ext>
             </a:extLst>
           </p:cNvPr>
@@ -7142,7 +7142,7 @@
           <p:cNvPr id="8" name="">
             <a:extLst xmlns:a="http://schemas.openxmlformats.org/drawingml/2006/main">
               <a:ext uri="{FF2B5EF4-FFF2-40B4-BE49-F238E27FC236}">
-                <a16:creationId xmlns:a16="http://schemas.microsoft.com/office/drawing/2014/main" id="{D3040C6E-2D54-4B5D-A118-D09BB5B0C922}"/>
+                <a16:creationId xmlns:a16="http://schemas.microsoft.com/office/drawing/2014/main" id="{B7358585-A9DC-450A-87C7-C9916C9E62AD}"/>
               </a:ext>
             </a:extLst>
           </p:cNvPr>
@@ -7199,7 +7199,7 @@
           <p:cNvPr id="9" name="">
             <a:extLst xmlns:a="http://schemas.openxmlformats.org/drawingml/2006/main">
               <a:ext uri="{FF2B5EF4-FFF2-40B4-BE49-F238E27FC236}">
-                <a16:creationId xmlns:a16="http://schemas.microsoft.com/office/drawing/2014/main" id="{110DBD25-5773-448C-9FC3-EFC0AE4000D1}"/>
+                <a16:creationId xmlns:a16="http://schemas.microsoft.com/office/drawing/2014/main" id="{7D96FB4C-8F28-40A7-BCA6-A0FA30D59AC5}"/>
               </a:ext>
             </a:extLst>
           </p:cNvPr>
@@ -7256,7 +7256,7 @@
           <p:cNvPr id="10" name="">
             <a:extLst xmlns:a="http://schemas.openxmlformats.org/drawingml/2006/main">
               <a:ext uri="{FF2B5EF4-FFF2-40B4-BE49-F238E27FC236}">
-                <a16:creationId xmlns:a16="http://schemas.microsoft.com/office/drawing/2014/main" id="{E1C72307-1850-451C-8554-3D5E5C010B81}"/>
+                <a16:creationId xmlns:a16="http://schemas.microsoft.com/office/drawing/2014/main" id="{9655C4A9-6D56-4BD1-A8E9-338C7CF61D85}"/>
               </a:ext>
             </a:extLst>
           </p:cNvPr>
@@ -7313,7 +7313,7 @@
           <p:cNvPr id="11" name="">
             <a:extLst xmlns:a="http://schemas.openxmlformats.org/drawingml/2006/main">
               <a:ext uri="{FF2B5EF4-FFF2-40B4-BE49-F238E27FC236}">
-                <a16:creationId xmlns:a16="http://schemas.microsoft.com/office/drawing/2014/main" id="{AE66AF4F-2463-4AE2-8224-D93D3EE38C3B}"/>
+                <a16:creationId xmlns:a16="http://schemas.microsoft.com/office/drawing/2014/main" id="{91727703-0093-490C-BACC-71D0A897C07D}"/>
               </a:ext>
             </a:extLst>
           </p:cNvPr>
@@ -7345,7 +7345,7 @@
           <p:cNvPr id="12" name="">
             <a:extLst xmlns:a="http://schemas.openxmlformats.org/drawingml/2006/main">
               <a:ext uri="{FF2B5EF4-FFF2-40B4-BE49-F238E27FC236}">
-                <a16:creationId xmlns:a16="http://schemas.microsoft.com/office/drawing/2014/main" id="{44B306FF-833F-4C27-9890-03F5B9EC5777}"/>
+                <a16:creationId xmlns:a16="http://schemas.microsoft.com/office/drawing/2014/main" id="{62BC9B9A-6DB4-4462-9C08-6E340F445B9E}"/>
               </a:ext>
             </a:extLst>
           </p:cNvPr>
@@ -7402,7 +7402,7 @@
           <p:cNvPr id="13" name="">
             <a:extLst xmlns:a="http://schemas.openxmlformats.org/drawingml/2006/main">
               <a:ext uri="{FF2B5EF4-FFF2-40B4-BE49-F238E27FC236}">
-                <a16:creationId xmlns:a16="http://schemas.microsoft.com/office/drawing/2014/main" id="{71E87245-F979-4A07-BFBB-51900DA12409}"/>
+                <a16:creationId xmlns:a16="http://schemas.microsoft.com/office/drawing/2014/main" id="{199F8100-5F9B-444A-B594-2DA9DB252CC1}"/>
               </a:ext>
             </a:extLst>
           </p:cNvPr>
@@ -7459,7 +7459,7 @@
           <p:cNvPr id="14" name="">
             <a:extLst xmlns:a="http://schemas.openxmlformats.org/drawingml/2006/main">
               <a:ext uri="{FF2B5EF4-FFF2-40B4-BE49-F238E27FC236}">
-                <a16:creationId xmlns:a16="http://schemas.microsoft.com/office/drawing/2014/main" id="{B66EC97A-95BD-4F7A-9C3B-B450E15C96F2}"/>
+                <a16:creationId xmlns:a16="http://schemas.microsoft.com/office/drawing/2014/main" id="{91A4AB88-CB63-423F-BB40-DCF75353C9AC}"/>
               </a:ext>
             </a:extLst>
           </p:cNvPr>
@@ -7516,7 +7516,7 @@
           <p:cNvPr id="15" name="">
             <a:extLst xmlns:a="http://schemas.openxmlformats.org/drawingml/2006/main">
               <a:ext uri="{FF2B5EF4-FFF2-40B4-BE49-F238E27FC236}">
-                <a16:creationId xmlns:a16="http://schemas.microsoft.com/office/drawing/2014/main" id="{167908E7-1105-430B-B5AE-89F19892D8DA}"/>
+                <a16:creationId xmlns:a16="http://schemas.microsoft.com/office/drawing/2014/main" id="{DAE348B5-47E8-4700-995B-D476348A6E6C}"/>
               </a:ext>
             </a:extLst>
           </p:cNvPr>
@@ -7571,7 +7571,7 @@
     </p:spTree>
     <p:extLst>
       <p:ext uri="{BB962C8B-B14F-4D97-AF65-F5344CB8AC3E}">
-        <p14:creationId xmlns:p14="http://schemas.microsoft.com/office/powerpoint/2010/main" val="1399735137"/>
+        <p14:creationId xmlns:p14="http://schemas.microsoft.com/office/powerpoint/2010/main" val="1507098773"/>
       </p:ext>
     </p:extLst>
   </p:cSld>
@@ -7772,7 +7772,7 @@
           <p:cNvPr id="23" name="">
             <a:extLst xmlns:a="http://schemas.openxmlformats.org/drawingml/2006/main">
               <a:ext uri="{FF2B5EF4-FFF2-40B4-BE49-F238E27FC236}">
-                <a16:creationId xmlns:a16="http://schemas.microsoft.com/office/drawing/2014/main" id="{42B87993-909D-4DD5-BAF8-86F8956C205C}"/>
+                <a16:creationId xmlns:a16="http://schemas.microsoft.com/office/drawing/2014/main" id="{AAE368D6-4CF5-48EB-8395-4442F65C215A}"/>
               </a:ext>
             </a:extLst>
           </p:cNvPr>
@@ -7804,7 +7804,7 @@
           <p:cNvPr id="2" name="">
             <a:extLst xmlns:a="http://schemas.openxmlformats.org/drawingml/2006/main">
               <a:ext uri="{FF2B5EF4-FFF2-40B4-BE49-F238E27FC236}">
-                <a16:creationId xmlns:a16="http://schemas.microsoft.com/office/drawing/2014/main" id="{58CEB939-F42F-4FA5-AB4C-82EC49C28B7D}"/>
+                <a16:creationId xmlns:a16="http://schemas.microsoft.com/office/drawing/2014/main" id="{ACC422A1-FFD3-45F9-B818-59D601FD86BF}"/>
               </a:ext>
             </a:extLst>
           </p:cNvPr>
@@ -7861,7 +7861,7 @@
           <p:cNvPr id="3" name="">
             <a:extLst xmlns:a="http://schemas.openxmlformats.org/drawingml/2006/main">
               <a:ext uri="{FF2B5EF4-FFF2-40B4-BE49-F238E27FC236}">
-                <a16:creationId xmlns:a16="http://schemas.microsoft.com/office/drawing/2014/main" id="{311D6ECF-1A25-448E-8CCF-9397F5A7C33F}"/>
+                <a16:creationId xmlns:a16="http://schemas.microsoft.com/office/drawing/2014/main" id="{FD6C25D0-5271-4961-BEB0-AEF2666387FA}"/>
               </a:ext>
             </a:extLst>
           </p:cNvPr>
@@ -7893,7 +7893,7 @@
           <p:cNvPr id="4" name="">
             <a:extLst xmlns:a="http://schemas.openxmlformats.org/drawingml/2006/main">
               <a:ext uri="{FF2B5EF4-FFF2-40B4-BE49-F238E27FC236}">
-                <a16:creationId xmlns:a16="http://schemas.microsoft.com/office/drawing/2014/main" id="{2E6FC6A9-C7D0-496F-A823-3311CFCF6584}"/>
+                <a16:creationId xmlns:a16="http://schemas.microsoft.com/office/drawing/2014/main" id="{581711DC-55D8-4E3E-B678-95E902E1D1D2}"/>
               </a:ext>
             </a:extLst>
           </p:cNvPr>
@@ -7950,7 +7950,7 @@
           <p:cNvPr id="5" name="">
             <a:extLst xmlns:a="http://schemas.openxmlformats.org/drawingml/2006/main">
               <a:ext uri="{FF2B5EF4-FFF2-40B4-BE49-F238E27FC236}">
-                <a16:creationId xmlns:a16="http://schemas.microsoft.com/office/drawing/2014/main" id="{A78072D2-3744-4F0D-AC4A-0B313A753097}"/>
+                <a16:creationId xmlns:a16="http://schemas.microsoft.com/office/drawing/2014/main" id="{CF30CD86-7259-4803-9271-C8A6EC03E078}"/>
               </a:ext>
             </a:extLst>
           </p:cNvPr>
@@ -8007,7 +8007,7 @@
           <p:cNvPr id="6" name="">
             <a:extLst xmlns:a="http://schemas.openxmlformats.org/drawingml/2006/main">
               <a:ext uri="{FF2B5EF4-FFF2-40B4-BE49-F238E27FC236}">
-                <a16:creationId xmlns:a16="http://schemas.microsoft.com/office/drawing/2014/main" id="{90178756-62CA-4D4D-B575-6160333F23F2}"/>
+                <a16:creationId xmlns:a16="http://schemas.microsoft.com/office/drawing/2014/main" id="{8C6697F2-B93E-4F1F-B55A-2B140C5E95AA}"/>
               </a:ext>
             </a:extLst>
           </p:cNvPr>
@@ -8064,7 +8064,7 @@
           <p:cNvPr id="7" name="">
             <a:extLst xmlns:a="http://schemas.openxmlformats.org/drawingml/2006/main">
               <a:ext uri="{FF2B5EF4-FFF2-40B4-BE49-F238E27FC236}">
-                <a16:creationId xmlns:a16="http://schemas.microsoft.com/office/drawing/2014/main" id="{5DDA3931-28E7-4EEA-A746-18FD3ACC132D}"/>
+                <a16:creationId xmlns:a16="http://schemas.microsoft.com/office/drawing/2014/main" id="{5C32825E-AE63-4C76-B32A-2515F2480077}"/>
               </a:ext>
             </a:extLst>
           </p:cNvPr>
@@ -8096,7 +8096,7 @@
           <p:cNvPr id="8" name="">
             <a:extLst xmlns:a="http://schemas.openxmlformats.org/drawingml/2006/main">
               <a:ext uri="{FF2B5EF4-FFF2-40B4-BE49-F238E27FC236}">
-                <a16:creationId xmlns:a16="http://schemas.microsoft.com/office/drawing/2014/main" id="{4EA5F1DD-CE18-41B7-A372-3D1265A0BC35}"/>
+                <a16:creationId xmlns:a16="http://schemas.microsoft.com/office/drawing/2014/main" id="{17A78692-A061-4B05-8B06-8AE048D254B8}"/>
               </a:ext>
             </a:extLst>
           </p:cNvPr>
@@ -8153,7 +8153,7 @@
           <p:cNvPr id="9" name="">
             <a:extLst xmlns:a="http://schemas.openxmlformats.org/drawingml/2006/main">
               <a:ext uri="{FF2B5EF4-FFF2-40B4-BE49-F238E27FC236}">
-                <a16:creationId xmlns:a16="http://schemas.microsoft.com/office/drawing/2014/main" id="{4BB275E6-272E-450D-8EDB-C33188B47EED}"/>
+                <a16:creationId xmlns:a16="http://schemas.microsoft.com/office/drawing/2014/main" id="{2163640D-6645-4055-9A1A-2A6DE7A8E342}"/>
               </a:ext>
             </a:extLst>
           </p:cNvPr>
@@ -8210,19 +8210,19 @@
           <p:cNvPr id="10" name="">
             <a:extLst xmlns:a="http://schemas.openxmlformats.org/drawingml/2006/main">
               <a:ext uri="{FF2B5EF4-FFF2-40B4-BE49-F238E27FC236}">
-                <a16:creationId xmlns:a16="http://schemas.microsoft.com/office/drawing/2014/main" id="{05DCF574-2910-4961-BF98-3BFEB9D778BD}"/>
-              </a:ext>
-            </a:extLst>
-          </p:cNvPr>
-          <p:cNvSpPr>
-            <a:spLocks xmlns:a="http://schemas.openxmlformats.org/drawingml/2006/main" noGrp="1"/>
-          </p:cNvSpPr>
-          <p:nvPr/>
-        </p:nvSpPr>
-        <p:spPr>
-          <a:xfrm xmlns:a="http://schemas.openxmlformats.org/drawingml/2006/main">
-            <a:off x="914400" y="1257300"/>
-            <a:ext cx="10363200" cy="781050"/>
+                <a16:creationId xmlns:a16="http://schemas.microsoft.com/office/drawing/2014/main" id="{6BE76789-5EFC-419F-BD96-64A15977C3A4}"/>
+              </a:ext>
+            </a:extLst>
+          </p:cNvPr>
+          <p:cNvSpPr>
+            <a:spLocks xmlns:a="http://schemas.openxmlformats.org/drawingml/2006/main" noGrp="1"/>
+          </p:cNvSpPr>
+          <p:nvPr/>
+        </p:nvSpPr>
+        <p:spPr>
+          <a:xfrm xmlns:a="http://schemas.openxmlformats.org/drawingml/2006/main">
+            <a:off x="857250" y="1219200"/>
+            <a:ext cx="10477500" cy="742950"/>
           </a:xfrm>
           <a:prstGeom xmlns:a="http://schemas.openxmlformats.org/drawingml/2006/main" prst="rect">
             <a:avLst/>
@@ -8239,7 +8239,7 @@
           <a:lstStyle xmlns:a="http://schemas.openxmlformats.org/drawingml/2006/main"/>
           <a:p xmlns:a="http://schemas.openxmlformats.org/drawingml/2006/main">
             <a:pPr algn="ctr">
-              <a:defRPr sz="2175" b="1">
+              <a:defRPr sz="2100" b="1">
                 <a:solidFill>
                   <a:srgbClr val="17253A"/>
                 </a:solidFill>
@@ -8249,7 +8249,7 @@
               </a:defRPr>
             </a:pPr>
             <a:r>
-              <a:rPr sz="2175" b="1">
+              <a:rPr sz="2100" b="1">
                 <a:solidFill>
                   <a:srgbClr val="17253A"/>
                 </a:solidFill>
@@ -8267,28 +8267,30 @@
           <p:cNvPr id="11" name="">
             <a:extLst xmlns:a="http://schemas.openxmlformats.org/drawingml/2006/main">
               <a:ext uri="{FF2B5EF4-FFF2-40B4-BE49-F238E27FC236}">
-                <a16:creationId xmlns:a16="http://schemas.microsoft.com/office/drawing/2014/main" id="{06E2E47C-8544-4558-A9A0-DFAD72C193DD}"/>
-              </a:ext>
-            </a:extLst>
-          </p:cNvPr>
-          <p:cNvSpPr>
-            <a:spLocks xmlns:a="http://schemas.openxmlformats.org/drawingml/2006/main" noGrp="1"/>
-          </p:cNvSpPr>
-          <p:nvPr/>
-        </p:nvSpPr>
-        <p:spPr>
-          <a:xfrm xmlns:a="http://schemas.openxmlformats.org/drawingml/2006/main">
-            <a:off x="1000125" y="2247900"/>
-            <a:ext cx="476250" cy="476250"/>
-          </a:xfrm>
-          <a:prstGeom xmlns:a="http://schemas.openxmlformats.org/drawingml/2006/main" prst="ellipse">
+                <a16:creationId xmlns:a16="http://schemas.microsoft.com/office/drawing/2014/main" id="{4CBF3D6C-24B2-404E-BB4B-A7DA6167032A}"/>
+              </a:ext>
+            </a:extLst>
+          </p:cNvPr>
+          <p:cNvSpPr>
+            <a:spLocks xmlns:a="http://schemas.openxmlformats.org/drawingml/2006/main" noGrp="1"/>
+          </p:cNvSpPr>
+          <p:nvPr/>
+        </p:nvSpPr>
+        <p:spPr>
+          <a:xfrm xmlns:a="http://schemas.openxmlformats.org/drawingml/2006/main">
+            <a:off x="971550" y="2124075"/>
+            <a:ext cx="38100" cy="3524250"/>
+          </a:xfrm>
+          <a:prstGeom xmlns:a="http://schemas.openxmlformats.org/drawingml/2006/main" prst="rect">
             <a:avLst/>
           </a:prstGeom>
           <a:solidFill xmlns:a="http://schemas.openxmlformats.org/drawingml/2006/main">
-            <a:srgbClr val="18324A"/>
+            <a:srgbClr val="2C6E73"/>
           </a:solidFill>
           <a:ln xmlns:a="http://schemas.openxmlformats.org/drawingml/2006/main" w="0">
-            <a:noFill/>
+            <a:solidFill>
+              <a:srgbClr val="2C6E73"/>
+            </a:solidFill>
           </a:ln>
         </p:spPr>
       </p:sp>
@@ -8297,19 +8299,19 @@
           <p:cNvPr id="12" name="">
             <a:extLst xmlns:a="http://schemas.openxmlformats.org/drawingml/2006/main">
               <a:ext uri="{FF2B5EF4-FFF2-40B4-BE49-F238E27FC236}">
-                <a16:creationId xmlns:a16="http://schemas.microsoft.com/office/drawing/2014/main" id="{2891C0E9-561B-4592-B913-2EAD04FEEE36}"/>
-              </a:ext>
-            </a:extLst>
-          </p:cNvPr>
-          <p:cNvSpPr>
-            <a:spLocks xmlns:a="http://schemas.openxmlformats.org/drawingml/2006/main" noGrp="1"/>
-          </p:cNvSpPr>
-          <p:nvPr/>
-        </p:nvSpPr>
-        <p:spPr>
-          <a:xfrm xmlns:a="http://schemas.openxmlformats.org/drawingml/2006/main">
-            <a:off x="1000125" y="2276475"/>
-            <a:ext cx="476250" cy="419100"/>
+                <a16:creationId xmlns:a16="http://schemas.microsoft.com/office/drawing/2014/main" id="{80A5EDB3-C7DA-4B32-A35B-D7EF45287BDA}"/>
+              </a:ext>
+            </a:extLst>
+          </p:cNvPr>
+          <p:cNvSpPr>
+            <a:spLocks xmlns:a="http://schemas.openxmlformats.org/drawingml/2006/main" noGrp="1"/>
+          </p:cNvSpPr>
+          <p:nvPr/>
+        </p:nvSpPr>
+        <p:spPr>
+          <a:xfrm xmlns:a="http://schemas.openxmlformats.org/drawingml/2006/main">
+            <a:off x="1162050" y="2200275"/>
+            <a:ext cx="400050" cy="400050"/>
           </a:xfrm>
           <a:prstGeom xmlns:a="http://schemas.openxmlformats.org/drawingml/2006/main" prst="rect">
             <a:avLst/>
@@ -8326,9 +8328,9 @@
           <a:lstStyle xmlns:a="http://schemas.openxmlformats.org/drawingml/2006/main"/>
           <a:p xmlns:a="http://schemas.openxmlformats.org/drawingml/2006/main">
             <a:pPr algn="ctr">
-              <a:defRPr sz="1350" b="1">
-                <a:solidFill>
-                  <a:srgbClr val="FFFFFF"/>
+              <a:defRPr sz="1125" b="1">
+                <a:solidFill>
+                  <a:srgbClr val="2C6E73"/>
                 </a:solidFill>
                 <a:latin typeface="Arial"/>
                 <a:ea typeface="Arial"/>
@@ -8336,9 +8338,9 @@
               </a:defRPr>
             </a:pPr>
             <a:r>
-              <a:rPr sz="1350" b="1">
-                <a:solidFill>
-                  <a:srgbClr val="FFFFFF"/>
+              <a:rPr sz="1125" b="1">
+                <a:solidFill>
+                  <a:srgbClr val="2C6E73"/>
                 </a:solidFill>
                 <a:latin typeface="Arial"/>
                 <a:ea typeface="Arial"/>
@@ -8354,19 +8356,19 @@
           <p:cNvPr id="13" name="">
             <a:extLst xmlns:a="http://schemas.openxmlformats.org/drawingml/2006/main">
               <a:ext uri="{FF2B5EF4-FFF2-40B4-BE49-F238E27FC236}">
-                <a16:creationId xmlns:a16="http://schemas.microsoft.com/office/drawing/2014/main" id="{6A121C79-1C2B-4058-A8CD-88D02672010E}"/>
-              </a:ext>
-            </a:extLst>
-          </p:cNvPr>
-          <p:cNvSpPr>
-            <a:spLocks xmlns:a="http://schemas.openxmlformats.org/drawingml/2006/main" noGrp="1"/>
-          </p:cNvSpPr>
-          <p:nvPr/>
-        </p:nvSpPr>
-        <p:spPr>
-          <a:xfrm xmlns:a="http://schemas.openxmlformats.org/drawingml/2006/main">
-            <a:off x="1714500" y="2181225"/>
-            <a:ext cx="9429750" cy="609600"/>
+                <a16:creationId xmlns:a16="http://schemas.microsoft.com/office/drawing/2014/main" id="{A37D0DF3-62BB-452A-A1BF-50AB92D285DB}"/>
+              </a:ext>
+            </a:extLst>
+          </p:cNvPr>
+          <p:cNvSpPr>
+            <a:spLocks xmlns:a="http://schemas.openxmlformats.org/drawingml/2006/main" noGrp="1"/>
+          </p:cNvSpPr>
+          <p:nvPr/>
+        </p:nvSpPr>
+        <p:spPr>
+          <a:xfrm xmlns:a="http://schemas.openxmlformats.org/drawingml/2006/main">
+            <a:off x="1714500" y="2114550"/>
+            <a:ext cx="9525000" cy="809625"/>
           </a:xfrm>
           <a:prstGeom xmlns:a="http://schemas.openxmlformats.org/drawingml/2006/main" prst="rect">
             <a:avLst/>
@@ -8383,7 +8385,7 @@
           <a:lstStyle xmlns:a="http://schemas.openxmlformats.org/drawingml/2006/main"/>
           <a:p xmlns:a="http://schemas.openxmlformats.org/drawingml/2006/main">
             <a:pPr algn="l">
-              <a:defRPr sz="1500" b="0">
+              <a:defRPr sz="1725" b="0">
                 <a:solidFill>
                   <a:srgbClr val="17253A"/>
                 </a:solidFill>
@@ -8393,7 +8395,7 @@
               </a:defRPr>
             </a:pPr>
             <a:r>
-              <a:rPr sz="1500" b="0">
+              <a:rPr sz="1725" b="0">
                 <a:solidFill>
                   <a:srgbClr val="17253A"/>
                 </a:solidFill>
@@ -8401,7 +8403,7 @@
                 <a:ea typeface="Arial"/>
                 <a:cs typeface="Arial"/>
               </a:rPr>
-              <a:t>Identify the structure: Represent the fraction as equal parts or use an equivalent multiplication.</a:t>
+              <a:t>1/3 ÷ 4</a:t>
             </a:r>
           </a:p>
         </p:txBody>
@@ -8411,28 +8413,30 @@
           <p:cNvPr id="14" name="">
             <a:extLst xmlns:a="http://schemas.openxmlformats.org/drawingml/2006/main">
               <a:ext uri="{FF2B5EF4-FFF2-40B4-BE49-F238E27FC236}">
-                <a16:creationId xmlns:a16="http://schemas.microsoft.com/office/drawing/2014/main" id="{3119B882-DC2C-4CEF-AED9-B0C11117356A}"/>
-              </a:ext>
-            </a:extLst>
-          </p:cNvPr>
-          <p:cNvSpPr>
-            <a:spLocks xmlns:a="http://schemas.openxmlformats.org/drawingml/2006/main" noGrp="1"/>
-          </p:cNvSpPr>
-          <p:nvPr/>
-        </p:nvSpPr>
-        <p:spPr>
-          <a:xfrm xmlns:a="http://schemas.openxmlformats.org/drawingml/2006/main">
-            <a:off x="1000125" y="2990850"/>
-            <a:ext cx="476250" cy="476250"/>
-          </a:xfrm>
-          <a:prstGeom xmlns:a="http://schemas.openxmlformats.org/drawingml/2006/main" prst="ellipse">
+                <a16:creationId xmlns:a16="http://schemas.microsoft.com/office/drawing/2014/main" id="{E57EE6AF-2ED4-4DF9-904B-2C6E53072759}"/>
+              </a:ext>
+            </a:extLst>
+          </p:cNvPr>
+          <p:cNvSpPr>
+            <a:spLocks xmlns:a="http://schemas.openxmlformats.org/drawingml/2006/main" noGrp="1"/>
+          </p:cNvSpPr>
+          <p:nvPr/>
+        </p:nvSpPr>
+        <p:spPr>
+          <a:xfrm xmlns:a="http://schemas.openxmlformats.org/drawingml/2006/main">
+            <a:off x="1714500" y="2943225"/>
+            <a:ext cx="9334500" cy="9525"/>
+          </a:xfrm>
+          <a:prstGeom xmlns:a="http://schemas.openxmlformats.org/drawingml/2006/main" prst="rect">
             <a:avLst/>
           </a:prstGeom>
           <a:solidFill xmlns:a="http://schemas.openxmlformats.org/drawingml/2006/main">
-            <a:srgbClr val="2C6E73"/>
+            <a:srgbClr val="D9E0E6"/>
           </a:solidFill>
           <a:ln xmlns:a="http://schemas.openxmlformats.org/drawingml/2006/main" w="0">
-            <a:noFill/>
+            <a:solidFill>
+              <a:srgbClr val="D9E0E6"/>
+            </a:solidFill>
           </a:ln>
         </p:spPr>
       </p:sp>
@@ -8441,19 +8445,19 @@
           <p:cNvPr id="15" name="">
             <a:extLst xmlns:a="http://schemas.openxmlformats.org/drawingml/2006/main">
               <a:ext uri="{FF2B5EF4-FFF2-40B4-BE49-F238E27FC236}">
-                <a16:creationId xmlns:a16="http://schemas.microsoft.com/office/drawing/2014/main" id="{9BD2C4B4-3E9C-4411-99A3-2542E36BBBE0}"/>
-              </a:ext>
-            </a:extLst>
-          </p:cNvPr>
-          <p:cNvSpPr>
-            <a:spLocks xmlns:a="http://schemas.openxmlformats.org/drawingml/2006/main" noGrp="1"/>
-          </p:cNvSpPr>
-          <p:nvPr/>
-        </p:nvSpPr>
-        <p:spPr>
-          <a:xfrm xmlns:a="http://schemas.openxmlformats.org/drawingml/2006/main">
-            <a:off x="1000125" y="3019425"/>
-            <a:ext cx="476250" cy="419100"/>
+                <a16:creationId xmlns:a16="http://schemas.microsoft.com/office/drawing/2014/main" id="{B9763B07-E074-472E-9656-9668C65D82F8}"/>
+              </a:ext>
+            </a:extLst>
+          </p:cNvPr>
+          <p:cNvSpPr>
+            <a:spLocks xmlns:a="http://schemas.openxmlformats.org/drawingml/2006/main" noGrp="1"/>
+          </p:cNvSpPr>
+          <p:nvPr/>
+        </p:nvSpPr>
+        <p:spPr>
+          <a:xfrm xmlns:a="http://schemas.openxmlformats.org/drawingml/2006/main">
+            <a:off x="1162050" y="3076575"/>
+            <a:ext cx="400050" cy="400050"/>
           </a:xfrm>
           <a:prstGeom xmlns:a="http://schemas.openxmlformats.org/drawingml/2006/main" prst="rect">
             <a:avLst/>
@@ -8470,9 +8474,9 @@
           <a:lstStyle xmlns:a="http://schemas.openxmlformats.org/drawingml/2006/main"/>
           <a:p xmlns:a="http://schemas.openxmlformats.org/drawingml/2006/main">
             <a:pPr algn="ctr">
-              <a:defRPr sz="1350" b="1">
-                <a:solidFill>
-                  <a:srgbClr val="FFFFFF"/>
+              <a:defRPr sz="1125" b="1">
+                <a:solidFill>
+                  <a:srgbClr val="2C6E73"/>
                 </a:solidFill>
                 <a:latin typeface="Arial"/>
                 <a:ea typeface="Arial"/>
@@ -8480,9 +8484,9 @@
               </a:defRPr>
             </a:pPr>
             <a:r>
-              <a:rPr sz="1350" b="1">
-                <a:solidFill>
-                  <a:srgbClr val="FFFFFF"/>
+              <a:rPr sz="1125" b="1">
+                <a:solidFill>
+                  <a:srgbClr val="2C6E73"/>
                 </a:solidFill>
                 <a:latin typeface="Arial"/>
                 <a:ea typeface="Arial"/>
@@ -8498,19 +8502,19 @@
           <p:cNvPr id="16" name="">
             <a:extLst xmlns:a="http://schemas.openxmlformats.org/drawingml/2006/main">
               <a:ext uri="{FF2B5EF4-FFF2-40B4-BE49-F238E27FC236}">
-                <a16:creationId xmlns:a16="http://schemas.microsoft.com/office/drawing/2014/main" id="{541DDC64-1656-4E67-94ED-09C360FF36EA}"/>
-              </a:ext>
-            </a:extLst>
-          </p:cNvPr>
-          <p:cNvSpPr>
-            <a:spLocks xmlns:a="http://schemas.openxmlformats.org/drawingml/2006/main" noGrp="1"/>
-          </p:cNvSpPr>
-          <p:nvPr/>
-        </p:nvSpPr>
-        <p:spPr>
-          <a:xfrm xmlns:a="http://schemas.openxmlformats.org/drawingml/2006/main">
-            <a:off x="1714500" y="2924175"/>
-            <a:ext cx="9429750" cy="609600"/>
+                <a16:creationId xmlns:a16="http://schemas.microsoft.com/office/drawing/2014/main" id="{DBDBECAB-4EB7-4806-80EF-FABEA5B529B8}"/>
+              </a:ext>
+            </a:extLst>
+          </p:cNvPr>
+          <p:cNvSpPr>
+            <a:spLocks xmlns:a="http://schemas.openxmlformats.org/drawingml/2006/main" noGrp="1"/>
+          </p:cNvSpPr>
+          <p:nvPr/>
+        </p:nvSpPr>
+        <p:spPr>
+          <a:xfrm xmlns:a="http://schemas.openxmlformats.org/drawingml/2006/main">
+            <a:off x="1714500" y="2990850"/>
+            <a:ext cx="9525000" cy="809625"/>
           </a:xfrm>
           <a:prstGeom xmlns:a="http://schemas.openxmlformats.org/drawingml/2006/main" prst="rect">
             <a:avLst/>
@@ -8527,7 +8531,7 @@
           <a:lstStyle xmlns:a="http://schemas.openxmlformats.org/drawingml/2006/main"/>
           <a:p xmlns:a="http://schemas.openxmlformats.org/drawingml/2006/main">
             <a:pPr algn="l">
-              <a:defRPr sz="1500" b="0">
+              <a:defRPr sz="1725" b="0">
                 <a:solidFill>
                   <a:srgbClr val="17253A"/>
                 </a:solidFill>
@@ -8537,7 +8541,7 @@
               </a:defRPr>
             </a:pPr>
             <a:r>
-              <a:rPr sz="1500" b="0">
+              <a:rPr sz="1725" b="0">
                 <a:solidFill>
                   <a:srgbClr val="17253A"/>
                 </a:solidFill>
@@ -8545,7 +8549,7 @@
                 <a:ea typeface="Arial"/>
                 <a:cs typeface="Arial"/>
               </a:rPr>
-              <a:t>Set up the method: Divide the numerator when possible or multiply the denominator by the whole number.</a:t>
+              <a:t>Dividing by 4 means multiply by 1/4</a:t>
             </a:r>
           </a:p>
         </p:txBody>
@@ -8555,28 +8559,30 @@
           <p:cNvPr id="17" name="">
             <a:extLst xmlns:a="http://schemas.openxmlformats.org/drawingml/2006/main">
               <a:ext uri="{FF2B5EF4-FFF2-40B4-BE49-F238E27FC236}">
-                <a16:creationId xmlns:a16="http://schemas.microsoft.com/office/drawing/2014/main" id="{9B15BE50-5405-4E6E-9194-5031F84BAD2B}"/>
-              </a:ext>
-            </a:extLst>
-          </p:cNvPr>
-          <p:cNvSpPr>
-            <a:spLocks xmlns:a="http://schemas.openxmlformats.org/drawingml/2006/main" noGrp="1"/>
-          </p:cNvSpPr>
-          <p:nvPr/>
-        </p:nvSpPr>
-        <p:spPr>
-          <a:xfrm xmlns:a="http://schemas.openxmlformats.org/drawingml/2006/main">
-            <a:off x="1000125" y="3733800"/>
-            <a:ext cx="476250" cy="476250"/>
-          </a:xfrm>
-          <a:prstGeom xmlns:a="http://schemas.openxmlformats.org/drawingml/2006/main" prst="ellipse">
+                <a16:creationId xmlns:a16="http://schemas.microsoft.com/office/drawing/2014/main" id="{23DB68F9-CFEF-40B2-9B72-B1D579226E01}"/>
+              </a:ext>
+            </a:extLst>
+          </p:cNvPr>
+          <p:cNvSpPr>
+            <a:spLocks xmlns:a="http://schemas.openxmlformats.org/drawingml/2006/main" noGrp="1"/>
+          </p:cNvSpPr>
+          <p:nvPr/>
+        </p:nvSpPr>
+        <p:spPr>
+          <a:xfrm xmlns:a="http://schemas.openxmlformats.org/drawingml/2006/main">
+            <a:off x="1714500" y="3819525"/>
+            <a:ext cx="9334500" cy="9525"/>
+          </a:xfrm>
+          <a:prstGeom xmlns:a="http://schemas.openxmlformats.org/drawingml/2006/main" prst="rect">
             <a:avLst/>
           </a:prstGeom>
           <a:solidFill xmlns:a="http://schemas.openxmlformats.org/drawingml/2006/main">
-            <a:srgbClr val="2C6E73"/>
+            <a:srgbClr val="D9E0E6"/>
           </a:solidFill>
           <a:ln xmlns:a="http://schemas.openxmlformats.org/drawingml/2006/main" w="0">
-            <a:noFill/>
+            <a:solidFill>
+              <a:srgbClr val="D9E0E6"/>
+            </a:solidFill>
           </a:ln>
         </p:spPr>
       </p:sp>
@@ -8585,19 +8591,19 @@
           <p:cNvPr id="18" name="">
             <a:extLst xmlns:a="http://schemas.openxmlformats.org/drawingml/2006/main">
               <a:ext uri="{FF2B5EF4-FFF2-40B4-BE49-F238E27FC236}">
-                <a16:creationId xmlns:a16="http://schemas.microsoft.com/office/drawing/2014/main" id="{CD43AACF-BB91-4189-B4B3-6C87192FBBC3}"/>
-              </a:ext>
-            </a:extLst>
-          </p:cNvPr>
-          <p:cNvSpPr>
-            <a:spLocks xmlns:a="http://schemas.openxmlformats.org/drawingml/2006/main" noGrp="1"/>
-          </p:cNvSpPr>
-          <p:nvPr/>
-        </p:nvSpPr>
-        <p:spPr>
-          <a:xfrm xmlns:a="http://schemas.openxmlformats.org/drawingml/2006/main">
-            <a:off x="1000125" y="3762375"/>
-            <a:ext cx="476250" cy="419100"/>
+                <a16:creationId xmlns:a16="http://schemas.microsoft.com/office/drawing/2014/main" id="{0064AE88-F081-48F8-B5C8-6FA7308B4ABB}"/>
+              </a:ext>
+            </a:extLst>
+          </p:cNvPr>
+          <p:cNvSpPr>
+            <a:spLocks xmlns:a="http://schemas.openxmlformats.org/drawingml/2006/main" noGrp="1"/>
+          </p:cNvSpPr>
+          <p:nvPr/>
+        </p:nvSpPr>
+        <p:spPr>
+          <a:xfrm xmlns:a="http://schemas.openxmlformats.org/drawingml/2006/main">
+            <a:off x="1162050" y="3952875"/>
+            <a:ext cx="400050" cy="400050"/>
           </a:xfrm>
           <a:prstGeom xmlns:a="http://schemas.openxmlformats.org/drawingml/2006/main" prst="rect">
             <a:avLst/>
@@ -8614,9 +8620,9 @@
           <a:lstStyle xmlns:a="http://schemas.openxmlformats.org/drawingml/2006/main"/>
           <a:p xmlns:a="http://schemas.openxmlformats.org/drawingml/2006/main">
             <a:pPr algn="ctr">
-              <a:defRPr sz="1350" b="1">
-                <a:solidFill>
-                  <a:srgbClr val="FFFFFF"/>
+              <a:defRPr sz="1125" b="1">
+                <a:solidFill>
+                  <a:srgbClr val="2C6E73"/>
                 </a:solidFill>
                 <a:latin typeface="Arial"/>
                 <a:ea typeface="Arial"/>
@@ -8624,9 +8630,9 @@
               </a:defRPr>
             </a:pPr>
             <a:r>
-              <a:rPr sz="1350" b="1">
-                <a:solidFill>
-                  <a:srgbClr val="FFFFFF"/>
+              <a:rPr sz="1125" b="1">
+                <a:solidFill>
+                  <a:srgbClr val="2C6E73"/>
                 </a:solidFill>
                 <a:latin typeface="Arial"/>
                 <a:ea typeface="Arial"/>
@@ -8642,19 +8648,19 @@
           <p:cNvPr id="19" name="">
             <a:extLst xmlns:a="http://schemas.openxmlformats.org/drawingml/2006/main">
               <a:ext uri="{FF2B5EF4-FFF2-40B4-BE49-F238E27FC236}">
-                <a16:creationId xmlns:a16="http://schemas.microsoft.com/office/drawing/2014/main" id="{9B2CE42D-769A-4022-9475-892A55A19D24}"/>
-              </a:ext>
-            </a:extLst>
-          </p:cNvPr>
-          <p:cNvSpPr>
-            <a:spLocks xmlns:a="http://schemas.openxmlformats.org/drawingml/2006/main" noGrp="1"/>
-          </p:cNvSpPr>
-          <p:nvPr/>
-        </p:nvSpPr>
-        <p:spPr>
-          <a:xfrm xmlns:a="http://schemas.openxmlformats.org/drawingml/2006/main">
-            <a:off x="1714500" y="3667125"/>
-            <a:ext cx="9429750" cy="609600"/>
+                <a16:creationId xmlns:a16="http://schemas.microsoft.com/office/drawing/2014/main" id="{4993B8AE-4053-4CEC-A188-713FFB4DB5EB}"/>
+              </a:ext>
+            </a:extLst>
+          </p:cNvPr>
+          <p:cNvSpPr>
+            <a:spLocks xmlns:a="http://schemas.openxmlformats.org/drawingml/2006/main" noGrp="1"/>
+          </p:cNvSpPr>
+          <p:nvPr/>
+        </p:nvSpPr>
+        <p:spPr>
+          <a:xfrm xmlns:a="http://schemas.openxmlformats.org/drawingml/2006/main">
+            <a:off x="1714500" y="3867150"/>
+            <a:ext cx="9525000" cy="809625"/>
           </a:xfrm>
           <a:prstGeom xmlns:a="http://schemas.openxmlformats.org/drawingml/2006/main" prst="rect">
             <a:avLst/>
@@ -8671,7 +8677,7 @@
           <a:lstStyle xmlns:a="http://schemas.openxmlformats.org/drawingml/2006/main"/>
           <a:p xmlns:a="http://schemas.openxmlformats.org/drawingml/2006/main">
             <a:pPr algn="l">
-              <a:defRPr sz="1500" b="0">
+              <a:defRPr sz="1725" b="0">
                 <a:solidFill>
                   <a:srgbClr val="17253A"/>
                 </a:solidFill>
@@ -8681,7 +8687,7 @@
               </a:defRPr>
             </a:pPr>
             <a:r>
-              <a:rPr sz="1500" b="0">
+              <a:rPr sz="1725" b="0">
                 <a:solidFill>
                   <a:srgbClr val="17253A"/>
                 </a:solidFill>
@@ -8689,7 +8695,7 @@
                 <a:ea typeface="Arial"/>
                 <a:cs typeface="Arial"/>
               </a:rPr>
-              <a:t>Complete the calculation: 1/12.</a:t>
+              <a:t>1/3 × 1/4</a:t>
             </a:r>
           </a:p>
         </p:txBody>
@@ -8699,28 +8705,30 @@
           <p:cNvPr id="20" name="">
             <a:extLst xmlns:a="http://schemas.openxmlformats.org/drawingml/2006/main">
               <a:ext uri="{FF2B5EF4-FFF2-40B4-BE49-F238E27FC236}">
-                <a16:creationId xmlns:a16="http://schemas.microsoft.com/office/drawing/2014/main" id="{CC5F953C-6D3F-49F7-95FA-2383E95A8897}"/>
-              </a:ext>
-            </a:extLst>
-          </p:cNvPr>
-          <p:cNvSpPr>
-            <a:spLocks xmlns:a="http://schemas.openxmlformats.org/drawingml/2006/main" noGrp="1"/>
-          </p:cNvSpPr>
-          <p:nvPr/>
-        </p:nvSpPr>
-        <p:spPr>
-          <a:xfrm xmlns:a="http://schemas.openxmlformats.org/drawingml/2006/main">
-            <a:off x="1000125" y="4476750"/>
-            <a:ext cx="476250" cy="476250"/>
-          </a:xfrm>
-          <a:prstGeom xmlns:a="http://schemas.openxmlformats.org/drawingml/2006/main" prst="ellipse">
+                <a16:creationId xmlns:a16="http://schemas.microsoft.com/office/drawing/2014/main" id="{1DDDDC26-50F6-4F06-958A-3945CF1EF27D}"/>
+              </a:ext>
+            </a:extLst>
+          </p:cNvPr>
+          <p:cNvSpPr>
+            <a:spLocks xmlns:a="http://schemas.openxmlformats.org/drawingml/2006/main" noGrp="1"/>
+          </p:cNvSpPr>
+          <p:nvPr/>
+        </p:nvSpPr>
+        <p:spPr>
+          <a:xfrm xmlns:a="http://schemas.openxmlformats.org/drawingml/2006/main">
+            <a:off x="1714500" y="4695825"/>
+            <a:ext cx="9334500" cy="9525"/>
+          </a:xfrm>
+          <a:prstGeom xmlns:a="http://schemas.openxmlformats.org/drawingml/2006/main" prst="rect">
             <a:avLst/>
           </a:prstGeom>
           <a:solidFill xmlns:a="http://schemas.openxmlformats.org/drawingml/2006/main">
-            <a:srgbClr val="2C6E73"/>
+            <a:srgbClr val="D9E0E6"/>
           </a:solidFill>
           <a:ln xmlns:a="http://schemas.openxmlformats.org/drawingml/2006/main" w="0">
-            <a:noFill/>
+            <a:solidFill>
+              <a:srgbClr val="D9E0E6"/>
+            </a:solidFill>
           </a:ln>
         </p:spPr>
       </p:sp>
@@ -8729,19 +8737,19 @@
           <p:cNvPr id="21" name="">
             <a:extLst xmlns:a="http://schemas.openxmlformats.org/drawingml/2006/main">
               <a:ext uri="{FF2B5EF4-FFF2-40B4-BE49-F238E27FC236}">
-                <a16:creationId xmlns:a16="http://schemas.microsoft.com/office/drawing/2014/main" id="{3D342FD1-DBB6-4393-B349-EE883A0E066C}"/>
-              </a:ext>
-            </a:extLst>
-          </p:cNvPr>
-          <p:cNvSpPr>
-            <a:spLocks xmlns:a="http://schemas.openxmlformats.org/drawingml/2006/main" noGrp="1"/>
-          </p:cNvSpPr>
-          <p:nvPr/>
-        </p:nvSpPr>
-        <p:spPr>
-          <a:xfrm xmlns:a="http://schemas.openxmlformats.org/drawingml/2006/main">
-            <a:off x="1000125" y="4505325"/>
-            <a:ext cx="476250" cy="419100"/>
+                <a16:creationId xmlns:a16="http://schemas.microsoft.com/office/drawing/2014/main" id="{32C3B3CA-F17C-43B4-92BC-AFCAA6FA80BA}"/>
+              </a:ext>
+            </a:extLst>
+          </p:cNvPr>
+          <p:cNvSpPr>
+            <a:spLocks xmlns:a="http://schemas.openxmlformats.org/drawingml/2006/main" noGrp="1"/>
+          </p:cNvSpPr>
+          <p:nvPr/>
+        </p:nvSpPr>
+        <p:spPr>
+          <a:xfrm xmlns:a="http://schemas.openxmlformats.org/drawingml/2006/main">
+            <a:off x="1162050" y="4829175"/>
+            <a:ext cx="400050" cy="400050"/>
           </a:xfrm>
           <a:prstGeom xmlns:a="http://schemas.openxmlformats.org/drawingml/2006/main" prst="rect">
             <a:avLst/>
@@ -8758,9 +8766,9 @@
           <a:lstStyle xmlns:a="http://schemas.openxmlformats.org/drawingml/2006/main"/>
           <a:p xmlns:a="http://schemas.openxmlformats.org/drawingml/2006/main">
             <a:pPr algn="ctr">
-              <a:defRPr sz="1350" b="1">
-                <a:solidFill>
-                  <a:srgbClr val="FFFFFF"/>
+              <a:defRPr sz="1125" b="1">
+                <a:solidFill>
+                  <a:srgbClr val="2F785D"/>
                 </a:solidFill>
                 <a:latin typeface="Arial"/>
                 <a:ea typeface="Arial"/>
@@ -8768,9 +8776,9 @@
               </a:defRPr>
             </a:pPr>
             <a:r>
-              <a:rPr sz="1350" b="1">
-                <a:solidFill>
-                  <a:srgbClr val="FFFFFF"/>
+              <a:rPr sz="1125" b="1">
+                <a:solidFill>
+                  <a:srgbClr val="2F785D"/>
                 </a:solidFill>
                 <a:latin typeface="Arial"/>
                 <a:ea typeface="Arial"/>
@@ -8786,19 +8794,19 @@
           <p:cNvPr id="22" name="">
             <a:extLst xmlns:a="http://schemas.openxmlformats.org/drawingml/2006/main">
               <a:ext uri="{FF2B5EF4-FFF2-40B4-BE49-F238E27FC236}">
-                <a16:creationId xmlns:a16="http://schemas.microsoft.com/office/drawing/2014/main" id="{65374563-AD60-422A-ABDE-56A8C19FE0AF}"/>
-              </a:ext>
-            </a:extLst>
-          </p:cNvPr>
-          <p:cNvSpPr>
-            <a:spLocks xmlns:a="http://schemas.openxmlformats.org/drawingml/2006/main" noGrp="1"/>
-          </p:cNvSpPr>
-          <p:nvPr/>
-        </p:nvSpPr>
-        <p:spPr>
-          <a:xfrm xmlns:a="http://schemas.openxmlformats.org/drawingml/2006/main">
-            <a:off x="1714500" y="4410075"/>
-            <a:ext cx="9429750" cy="609600"/>
+                <a16:creationId xmlns:a16="http://schemas.microsoft.com/office/drawing/2014/main" id="{4E76551D-9CA4-49E2-A146-6029D08AF8E7}"/>
+              </a:ext>
+            </a:extLst>
+          </p:cNvPr>
+          <p:cNvSpPr>
+            <a:spLocks xmlns:a="http://schemas.openxmlformats.org/drawingml/2006/main" noGrp="1"/>
+          </p:cNvSpPr>
+          <p:nvPr/>
+        </p:nvSpPr>
+        <p:spPr>
+          <a:xfrm xmlns:a="http://schemas.openxmlformats.org/drawingml/2006/main">
+            <a:off x="1714500" y="4743450"/>
+            <a:ext cx="9525000" cy="809625"/>
           </a:xfrm>
           <a:prstGeom xmlns:a="http://schemas.openxmlformats.org/drawingml/2006/main" prst="rect">
             <a:avLst/>
@@ -8815,7 +8823,7 @@
           <a:lstStyle xmlns:a="http://schemas.openxmlformats.org/drawingml/2006/main"/>
           <a:p xmlns:a="http://schemas.openxmlformats.org/drawingml/2006/main">
             <a:pPr algn="l">
-              <a:defRPr sz="1500" b="1">
+              <a:defRPr sz="1725" b="1">
                 <a:solidFill>
                   <a:srgbClr val="2F785D"/>
                 </a:solidFill>
@@ -8825,7 +8833,7 @@
               </a:defRPr>
             </a:pPr>
             <a:r>
-              <a:rPr sz="1500" b="1">
+              <a:rPr sz="1725" b="1">
                 <a:solidFill>
                   <a:srgbClr val="2F785D"/>
                 </a:solidFill>
@@ -8833,7 +8841,7 @@
                 <a:ea typeface="Arial"/>
                 <a:cs typeface="Arial"/>
               </a:rPr>
-              <a:t>Check the result: Simplify and check by multiplying back.</a:t>
+              <a:t>1/12</a:t>
             </a:r>
           </a:p>
         </p:txBody>
@@ -8841,7 +8849,7 @@
     </p:spTree>
     <p:extLst>
       <p:ext uri="{BB962C8B-B14F-4D97-AF65-F5344CB8AC3E}">
-        <p14:creationId xmlns:p14="http://schemas.microsoft.com/office/powerpoint/2010/main" val="1391516697"/>
+        <p14:creationId xmlns:p14="http://schemas.microsoft.com/office/powerpoint/2010/main" val="40703554"/>
       </p:ext>
     </p:extLst>
   </p:cSld>
@@ -9134,7 +9142,7 @@
           <p:cNvPr id="15" name="">
             <a:extLst xmlns:a="http://schemas.openxmlformats.org/drawingml/2006/main">
               <a:ext uri="{FF2B5EF4-FFF2-40B4-BE49-F238E27FC236}">
-                <a16:creationId xmlns:a16="http://schemas.microsoft.com/office/drawing/2014/main" id="{5B10091E-1412-4D1F-8D89-3B5BC5AF2819}"/>
+                <a16:creationId xmlns:a16="http://schemas.microsoft.com/office/drawing/2014/main" id="{1FB09E7E-D28C-4B43-9835-30C2C43761EA}"/>
               </a:ext>
             </a:extLst>
           </p:cNvPr>
@@ -9166,7 +9174,7 @@
           <p:cNvPr id="2" name="">
             <a:extLst xmlns:a="http://schemas.openxmlformats.org/drawingml/2006/main">
               <a:ext uri="{FF2B5EF4-FFF2-40B4-BE49-F238E27FC236}">
-                <a16:creationId xmlns:a16="http://schemas.microsoft.com/office/drawing/2014/main" id="{6F04CB3A-1BD2-44E5-9336-8B5D0B2F4A88}"/>
+                <a16:creationId xmlns:a16="http://schemas.microsoft.com/office/drawing/2014/main" id="{49AE7BF8-302F-4F7C-B2F0-DD420F237067}"/>
               </a:ext>
             </a:extLst>
           </p:cNvPr>
@@ -9223,7 +9231,7 @@
           <p:cNvPr id="3" name="">
             <a:extLst xmlns:a="http://schemas.openxmlformats.org/drawingml/2006/main">
               <a:ext uri="{FF2B5EF4-FFF2-40B4-BE49-F238E27FC236}">
-                <a16:creationId xmlns:a16="http://schemas.microsoft.com/office/drawing/2014/main" id="{C4C06DB8-D32A-492B-82C9-C529F9A9B80E}"/>
+                <a16:creationId xmlns:a16="http://schemas.microsoft.com/office/drawing/2014/main" id="{ECF7594F-F6F1-4797-8A4F-FBAEA0958534}"/>
               </a:ext>
             </a:extLst>
           </p:cNvPr>
@@ -9255,7 +9263,7 @@
           <p:cNvPr id="4" name="">
             <a:extLst xmlns:a="http://schemas.openxmlformats.org/drawingml/2006/main">
               <a:ext uri="{FF2B5EF4-FFF2-40B4-BE49-F238E27FC236}">
-                <a16:creationId xmlns:a16="http://schemas.microsoft.com/office/drawing/2014/main" id="{56B799BF-818B-43BE-BDB7-4896D0FDD17C}"/>
+                <a16:creationId xmlns:a16="http://schemas.microsoft.com/office/drawing/2014/main" id="{46C7AB96-0A2A-492C-AC5E-484076A25191}"/>
               </a:ext>
             </a:extLst>
           </p:cNvPr>
@@ -9312,7 +9320,7 @@
           <p:cNvPr id="5" name="">
             <a:extLst xmlns:a="http://schemas.openxmlformats.org/drawingml/2006/main">
               <a:ext uri="{FF2B5EF4-FFF2-40B4-BE49-F238E27FC236}">
-                <a16:creationId xmlns:a16="http://schemas.microsoft.com/office/drawing/2014/main" id="{F97D2B61-0AE7-4F98-94CE-A70E8010460A}"/>
+                <a16:creationId xmlns:a16="http://schemas.microsoft.com/office/drawing/2014/main" id="{CA7FB146-4CEE-4277-8489-A6C4BA37B3EB}"/>
               </a:ext>
             </a:extLst>
           </p:cNvPr>
@@ -9369,7 +9377,7 @@
           <p:cNvPr id="6" name="">
             <a:extLst xmlns:a="http://schemas.openxmlformats.org/drawingml/2006/main">
               <a:ext uri="{FF2B5EF4-FFF2-40B4-BE49-F238E27FC236}">
-                <a16:creationId xmlns:a16="http://schemas.microsoft.com/office/drawing/2014/main" id="{161C7073-12D5-4442-9803-780769CDECF0}"/>
+                <a16:creationId xmlns:a16="http://schemas.microsoft.com/office/drawing/2014/main" id="{CD01CA56-47BD-400E-AB00-EBC908C316FA}"/>
               </a:ext>
             </a:extLst>
           </p:cNvPr>
@@ -9426,7 +9434,7 @@
           <p:cNvPr id="7" name="">
             <a:extLst xmlns:a="http://schemas.openxmlformats.org/drawingml/2006/main">
               <a:ext uri="{FF2B5EF4-FFF2-40B4-BE49-F238E27FC236}">
-                <a16:creationId xmlns:a16="http://schemas.microsoft.com/office/drawing/2014/main" id="{46DAEB6B-6BA4-4DA5-AFAB-D59750167EB6}"/>
+                <a16:creationId xmlns:a16="http://schemas.microsoft.com/office/drawing/2014/main" id="{9FA810F1-047C-4B94-B4CB-88FF6A50A91A}"/>
               </a:ext>
             </a:extLst>
           </p:cNvPr>
@@ -9458,7 +9466,7 @@
           <p:cNvPr id="8" name="">
             <a:extLst xmlns:a="http://schemas.openxmlformats.org/drawingml/2006/main">
               <a:ext uri="{FF2B5EF4-FFF2-40B4-BE49-F238E27FC236}">
-                <a16:creationId xmlns:a16="http://schemas.microsoft.com/office/drawing/2014/main" id="{5E1A2F36-5E63-45BB-801B-4FA06B79CB37}"/>
+                <a16:creationId xmlns:a16="http://schemas.microsoft.com/office/drawing/2014/main" id="{04790226-01CE-4CAA-9CC3-7AFFE150E24F}"/>
               </a:ext>
             </a:extLst>
           </p:cNvPr>
@@ -9515,7 +9523,7 @@
           <p:cNvPr id="9" name="">
             <a:extLst xmlns:a="http://schemas.openxmlformats.org/drawingml/2006/main">
               <a:ext uri="{FF2B5EF4-FFF2-40B4-BE49-F238E27FC236}">
-                <a16:creationId xmlns:a16="http://schemas.microsoft.com/office/drawing/2014/main" id="{AF265CEF-0A6C-4269-AFE7-4D0352B54035}"/>
+                <a16:creationId xmlns:a16="http://schemas.microsoft.com/office/drawing/2014/main" id="{737409D8-8BE7-4F40-9587-4D51D6196B5C}"/>
               </a:ext>
             </a:extLst>
           </p:cNvPr>
@@ -9572,7 +9580,7 @@
           <p:cNvPr id="10" name="">
             <a:extLst xmlns:a="http://schemas.openxmlformats.org/drawingml/2006/main">
               <a:ext uri="{FF2B5EF4-FFF2-40B4-BE49-F238E27FC236}">
-                <a16:creationId xmlns:a16="http://schemas.microsoft.com/office/drawing/2014/main" id="{BA441AF1-9DB0-48E3-A645-FFC93B13BE33}"/>
+                <a16:creationId xmlns:a16="http://schemas.microsoft.com/office/drawing/2014/main" id="{645910AB-3F17-497E-8552-9C887136B113}"/>
               </a:ext>
             </a:extLst>
           </p:cNvPr>
@@ -9629,7 +9637,7 @@
           <p:cNvPr id="11" name="">
             <a:extLst xmlns:a="http://schemas.openxmlformats.org/drawingml/2006/main">
               <a:ext uri="{FF2B5EF4-FFF2-40B4-BE49-F238E27FC236}">
-                <a16:creationId xmlns:a16="http://schemas.microsoft.com/office/drawing/2014/main" id="{6393144C-8A3F-45FA-A01D-EEFB881EE987}"/>
+                <a16:creationId xmlns:a16="http://schemas.microsoft.com/office/drawing/2014/main" id="{DC089F68-5FAA-41C1-8D51-BB407B77C4E9}"/>
               </a:ext>
             </a:extLst>
           </p:cNvPr>
@@ -9686,7 +9694,7 @@
           <p:cNvPr id="12" name="">
             <a:extLst xmlns:a="http://schemas.openxmlformats.org/drawingml/2006/main">
               <a:ext uri="{FF2B5EF4-FFF2-40B4-BE49-F238E27FC236}">
-                <a16:creationId xmlns:a16="http://schemas.microsoft.com/office/drawing/2014/main" id="{DD8573FE-12C0-47E2-B714-CBCDA648EC52}"/>
+                <a16:creationId xmlns:a16="http://schemas.microsoft.com/office/drawing/2014/main" id="{33081AB0-3009-4C27-ABE0-CDDE36F7E622}"/>
               </a:ext>
             </a:extLst>
           </p:cNvPr>
@@ -9718,7 +9726,7 @@
           <p:cNvPr id="13" name="">
             <a:extLst xmlns:a="http://schemas.openxmlformats.org/drawingml/2006/main">
               <a:ext uri="{FF2B5EF4-FFF2-40B4-BE49-F238E27FC236}">
-                <a16:creationId xmlns:a16="http://schemas.microsoft.com/office/drawing/2014/main" id="{A2DFC975-1F32-488A-AEDD-CFCD9BA10C7E}"/>
+                <a16:creationId xmlns:a16="http://schemas.microsoft.com/office/drawing/2014/main" id="{AB44700E-F057-4F74-BAB6-59A1883C4307}"/>
               </a:ext>
             </a:extLst>
           </p:cNvPr>
@@ -9775,7 +9783,7 @@
           <p:cNvPr id="14" name="">
             <a:extLst xmlns:a="http://schemas.openxmlformats.org/drawingml/2006/main">
               <a:ext uri="{FF2B5EF4-FFF2-40B4-BE49-F238E27FC236}">
-                <a16:creationId xmlns:a16="http://schemas.microsoft.com/office/drawing/2014/main" id="{89C76B9B-CFD8-41CA-B6CD-F919E3BB1078}"/>
+                <a16:creationId xmlns:a16="http://schemas.microsoft.com/office/drawing/2014/main" id="{9881DE20-378A-4F09-BE12-75FB2442729F}"/>
               </a:ext>
             </a:extLst>
           </p:cNvPr>
@@ -9830,7 +9838,7 @@
     </p:spTree>
     <p:extLst>
       <p:ext uri="{BB962C8B-B14F-4D97-AF65-F5344CB8AC3E}">
-        <p14:creationId xmlns:p14="http://schemas.microsoft.com/office/powerpoint/2010/main" val="138076691"/>
+        <p14:creationId xmlns:p14="http://schemas.microsoft.com/office/powerpoint/2010/main" val="1104887092"/>
       </p:ext>
     </p:extLst>
   </p:cSld>
@@ -10031,7 +10039,7 @@
           <p:cNvPr id="16" name="">
             <a:extLst xmlns:a="http://schemas.openxmlformats.org/drawingml/2006/main">
               <a:ext uri="{FF2B5EF4-FFF2-40B4-BE49-F238E27FC236}">
-                <a16:creationId xmlns:a16="http://schemas.microsoft.com/office/drawing/2014/main" id="{71D7BF05-5978-4E61-A8F6-2E2E66B08521}"/>
+                <a16:creationId xmlns:a16="http://schemas.microsoft.com/office/drawing/2014/main" id="{03022255-E5B2-4F7E-B47E-A687CE7A0826}"/>
               </a:ext>
             </a:extLst>
           </p:cNvPr>
@@ -10063,7 +10071,7 @@
           <p:cNvPr id="2" name="">
             <a:extLst xmlns:a="http://schemas.openxmlformats.org/drawingml/2006/main">
               <a:ext uri="{FF2B5EF4-FFF2-40B4-BE49-F238E27FC236}">
-                <a16:creationId xmlns:a16="http://schemas.microsoft.com/office/drawing/2014/main" id="{2D66EB0F-E3CB-4FEC-B18B-2A367894D545}"/>
+                <a16:creationId xmlns:a16="http://schemas.microsoft.com/office/drawing/2014/main" id="{B9D9F74F-D917-4635-BD39-F60A55F04AD5}"/>
               </a:ext>
             </a:extLst>
           </p:cNvPr>
@@ -10120,7 +10128,7 @@
           <p:cNvPr id="3" name="">
             <a:extLst xmlns:a="http://schemas.openxmlformats.org/drawingml/2006/main">
               <a:ext uri="{FF2B5EF4-FFF2-40B4-BE49-F238E27FC236}">
-                <a16:creationId xmlns:a16="http://schemas.microsoft.com/office/drawing/2014/main" id="{BF11E5F7-0AAD-4936-A283-4142A64C0621}"/>
+                <a16:creationId xmlns:a16="http://schemas.microsoft.com/office/drawing/2014/main" id="{CCD8C6A3-6710-4E57-B0D1-A77DAD43FBBE}"/>
               </a:ext>
             </a:extLst>
           </p:cNvPr>
@@ -10152,7 +10160,7 @@
           <p:cNvPr id="4" name="">
             <a:extLst xmlns:a="http://schemas.openxmlformats.org/drawingml/2006/main">
               <a:ext uri="{FF2B5EF4-FFF2-40B4-BE49-F238E27FC236}">
-                <a16:creationId xmlns:a16="http://schemas.microsoft.com/office/drawing/2014/main" id="{100A889A-C292-4C64-B626-7E99C2834275}"/>
+                <a16:creationId xmlns:a16="http://schemas.microsoft.com/office/drawing/2014/main" id="{02265BAB-16B7-4988-85D3-0528274315DE}"/>
               </a:ext>
             </a:extLst>
           </p:cNvPr>
@@ -10209,7 +10217,7 @@
           <p:cNvPr id="5" name="">
             <a:extLst xmlns:a="http://schemas.openxmlformats.org/drawingml/2006/main">
               <a:ext uri="{FF2B5EF4-FFF2-40B4-BE49-F238E27FC236}">
-                <a16:creationId xmlns:a16="http://schemas.microsoft.com/office/drawing/2014/main" id="{4F717E0C-F70D-4B48-86D5-C5487B674EC3}"/>
+                <a16:creationId xmlns:a16="http://schemas.microsoft.com/office/drawing/2014/main" id="{89BD2F63-CFF4-4FDF-AE00-DE0945373859}"/>
               </a:ext>
             </a:extLst>
           </p:cNvPr>
@@ -10266,7 +10274,7 @@
           <p:cNvPr id="6" name="">
             <a:extLst xmlns:a="http://schemas.openxmlformats.org/drawingml/2006/main">
               <a:ext uri="{FF2B5EF4-FFF2-40B4-BE49-F238E27FC236}">
-                <a16:creationId xmlns:a16="http://schemas.microsoft.com/office/drawing/2014/main" id="{D26DD656-43E4-4D41-A35B-0E4E60B63CF4}"/>
+                <a16:creationId xmlns:a16="http://schemas.microsoft.com/office/drawing/2014/main" id="{72AE59D6-FC42-4D40-B9ED-A12E0E26263F}"/>
               </a:ext>
             </a:extLst>
           </p:cNvPr>
@@ -10323,7 +10331,7 @@
           <p:cNvPr id="7" name="">
             <a:extLst xmlns:a="http://schemas.openxmlformats.org/drawingml/2006/main">
               <a:ext uri="{FF2B5EF4-FFF2-40B4-BE49-F238E27FC236}">
-                <a16:creationId xmlns:a16="http://schemas.microsoft.com/office/drawing/2014/main" id="{7B3994C0-2841-4ACC-9ED6-E32B621FF2B3}"/>
+                <a16:creationId xmlns:a16="http://schemas.microsoft.com/office/drawing/2014/main" id="{3FC427A4-344D-4D17-AE25-CBB500BDB981}"/>
               </a:ext>
             </a:extLst>
           </p:cNvPr>
@@ -10355,7 +10363,7 @@
           <p:cNvPr id="8" name="">
             <a:extLst xmlns:a="http://schemas.openxmlformats.org/drawingml/2006/main">
               <a:ext uri="{FF2B5EF4-FFF2-40B4-BE49-F238E27FC236}">
-                <a16:creationId xmlns:a16="http://schemas.microsoft.com/office/drawing/2014/main" id="{909281C5-DDD0-4C94-A888-C894CD8DEC13}"/>
+                <a16:creationId xmlns:a16="http://schemas.microsoft.com/office/drawing/2014/main" id="{71BD7F96-4D4A-4BE4-B234-32A8C9B56C1A}"/>
               </a:ext>
             </a:extLst>
           </p:cNvPr>
@@ -10412,7 +10420,7 @@
           <p:cNvPr id="9" name="">
             <a:extLst xmlns:a="http://schemas.openxmlformats.org/drawingml/2006/main">
               <a:ext uri="{FF2B5EF4-FFF2-40B4-BE49-F238E27FC236}">
-                <a16:creationId xmlns:a16="http://schemas.microsoft.com/office/drawing/2014/main" id="{E6CB5CA7-E80C-4661-83AF-C893374187FF}"/>
+                <a16:creationId xmlns:a16="http://schemas.microsoft.com/office/drawing/2014/main" id="{198F8FA3-59DD-4274-B93D-2A280E543131}"/>
               </a:ext>
             </a:extLst>
           </p:cNvPr>
@@ -10469,7 +10477,7 @@
           <p:cNvPr id="10" name="">
             <a:extLst xmlns:a="http://schemas.openxmlformats.org/drawingml/2006/main">
               <a:ext uri="{FF2B5EF4-FFF2-40B4-BE49-F238E27FC236}">
-                <a16:creationId xmlns:a16="http://schemas.microsoft.com/office/drawing/2014/main" id="{18E63D00-62B9-47C8-BDC1-F09FBEF52931}"/>
+                <a16:creationId xmlns:a16="http://schemas.microsoft.com/office/drawing/2014/main" id="{753FEE01-722E-457B-8A5F-D81A7F3E7375}"/>
               </a:ext>
             </a:extLst>
           </p:cNvPr>
@@ -10526,7 +10534,7 @@
           <p:cNvPr id="11" name="">
             <a:extLst xmlns:a="http://schemas.openxmlformats.org/drawingml/2006/main">
               <a:ext uri="{FF2B5EF4-FFF2-40B4-BE49-F238E27FC236}">
-                <a16:creationId xmlns:a16="http://schemas.microsoft.com/office/drawing/2014/main" id="{0E9CE52B-D2AB-47B1-8F5E-A91D97C3AF78}"/>
+                <a16:creationId xmlns:a16="http://schemas.microsoft.com/office/drawing/2014/main" id="{575359CB-2EA3-4631-AB3F-9671B0AEAAF5}"/>
               </a:ext>
             </a:extLst>
           </p:cNvPr>
@@ -10583,7 +10591,7 @@
           <p:cNvPr id="12" name="">
             <a:extLst xmlns:a="http://schemas.openxmlformats.org/drawingml/2006/main">
               <a:ext uri="{FF2B5EF4-FFF2-40B4-BE49-F238E27FC236}">
-                <a16:creationId xmlns:a16="http://schemas.microsoft.com/office/drawing/2014/main" id="{8196D68A-EE66-416B-8B27-E8E08B7CB315}"/>
+                <a16:creationId xmlns:a16="http://schemas.microsoft.com/office/drawing/2014/main" id="{BB741D46-EAA8-4F87-B944-4267D2711498}"/>
               </a:ext>
             </a:extLst>
           </p:cNvPr>
@@ -10640,7 +10648,7 @@
           <p:cNvPr id="13" name="">
             <a:extLst xmlns:a="http://schemas.openxmlformats.org/drawingml/2006/main">
               <a:ext uri="{FF2B5EF4-FFF2-40B4-BE49-F238E27FC236}">
-                <a16:creationId xmlns:a16="http://schemas.microsoft.com/office/drawing/2014/main" id="{B028ADF9-9799-465F-B813-B6FC7283CF8A}"/>
+                <a16:creationId xmlns:a16="http://schemas.microsoft.com/office/drawing/2014/main" id="{3EAE0771-E20C-464A-B7D9-31E339DB0F20}"/>
               </a:ext>
             </a:extLst>
           </p:cNvPr>
@@ -10697,7 +10705,7 @@
           <p:cNvPr id="14" name="">
             <a:extLst xmlns:a="http://schemas.openxmlformats.org/drawingml/2006/main">
               <a:ext uri="{FF2B5EF4-FFF2-40B4-BE49-F238E27FC236}">
-                <a16:creationId xmlns:a16="http://schemas.microsoft.com/office/drawing/2014/main" id="{A08FD075-FB17-4D24-AF50-2C668DB6F882}"/>
+                <a16:creationId xmlns:a16="http://schemas.microsoft.com/office/drawing/2014/main" id="{21A5FD2D-4039-4611-9C37-C81B575C27F3}"/>
               </a:ext>
             </a:extLst>
           </p:cNvPr>
@@ -10754,7 +10762,7 @@
           <p:cNvPr id="15" name="">
             <a:extLst xmlns:a="http://schemas.openxmlformats.org/drawingml/2006/main">
               <a:ext uri="{FF2B5EF4-FFF2-40B4-BE49-F238E27FC236}">
-                <a16:creationId xmlns:a16="http://schemas.microsoft.com/office/drawing/2014/main" id="{667E019B-C507-4933-820C-8FE0782AC0B1}"/>
+                <a16:creationId xmlns:a16="http://schemas.microsoft.com/office/drawing/2014/main" id="{7E71FDBA-4A76-4498-80BF-404B635AD7AB}"/>
               </a:ext>
             </a:extLst>
           </p:cNvPr>
@@ -10809,7 +10817,7 @@
     </p:spTree>
     <p:extLst>
       <p:ext uri="{BB962C8B-B14F-4D97-AF65-F5344CB8AC3E}">
-        <p14:creationId xmlns:p14="http://schemas.microsoft.com/office/powerpoint/2010/main" val="576072944"/>
+        <p14:creationId xmlns:p14="http://schemas.microsoft.com/office/powerpoint/2010/main" val="1756327509"/>
       </p:ext>
     </p:extLst>
   </p:cSld>
@@ -10964,7 +10972,7 @@
           <p:cNvPr id="16" name="">
             <a:extLst xmlns:a="http://schemas.openxmlformats.org/drawingml/2006/main">
               <a:ext uri="{FF2B5EF4-FFF2-40B4-BE49-F238E27FC236}">
-                <a16:creationId xmlns:a16="http://schemas.microsoft.com/office/drawing/2014/main" id="{A8A77CF8-A2AF-4960-B22B-517A12B1AD81}"/>
+                <a16:creationId xmlns:a16="http://schemas.microsoft.com/office/drawing/2014/main" id="{70FA9A98-4AC9-4947-9438-6FC329B2582A}"/>
               </a:ext>
             </a:extLst>
           </p:cNvPr>
@@ -10996,7 +11004,7 @@
           <p:cNvPr id="2" name="">
             <a:extLst xmlns:a="http://schemas.openxmlformats.org/drawingml/2006/main">
               <a:ext uri="{FF2B5EF4-FFF2-40B4-BE49-F238E27FC236}">
-                <a16:creationId xmlns:a16="http://schemas.microsoft.com/office/drawing/2014/main" id="{0BB349E1-E9F9-4C0F-937E-B4075B11A16C}"/>
+                <a16:creationId xmlns:a16="http://schemas.microsoft.com/office/drawing/2014/main" id="{3D35684F-4AB0-411C-AB1A-BA88D62EE5C7}"/>
               </a:ext>
             </a:extLst>
           </p:cNvPr>
@@ -11053,7 +11061,7 @@
           <p:cNvPr id="3" name="">
             <a:extLst xmlns:a="http://schemas.openxmlformats.org/drawingml/2006/main">
               <a:ext uri="{FF2B5EF4-FFF2-40B4-BE49-F238E27FC236}">
-                <a16:creationId xmlns:a16="http://schemas.microsoft.com/office/drawing/2014/main" id="{AB6EAF04-8783-4D59-B995-43AD56F0C7AA}"/>
+                <a16:creationId xmlns:a16="http://schemas.microsoft.com/office/drawing/2014/main" id="{50F08060-7B5B-4503-9620-3CC820B194E4}"/>
               </a:ext>
             </a:extLst>
           </p:cNvPr>
@@ -11085,7 +11093,7 @@
           <p:cNvPr id="4" name="">
             <a:extLst xmlns:a="http://schemas.openxmlformats.org/drawingml/2006/main">
               <a:ext uri="{FF2B5EF4-FFF2-40B4-BE49-F238E27FC236}">
-                <a16:creationId xmlns:a16="http://schemas.microsoft.com/office/drawing/2014/main" id="{57B12442-F346-4819-BB5A-C065CD27EF93}"/>
+                <a16:creationId xmlns:a16="http://schemas.microsoft.com/office/drawing/2014/main" id="{8D091873-79CA-4545-B9E7-2D6366F288B2}"/>
               </a:ext>
             </a:extLst>
           </p:cNvPr>
@@ -11142,7 +11150,7 @@
           <p:cNvPr id="5" name="">
             <a:extLst xmlns:a="http://schemas.openxmlformats.org/drawingml/2006/main">
               <a:ext uri="{FF2B5EF4-FFF2-40B4-BE49-F238E27FC236}">
-                <a16:creationId xmlns:a16="http://schemas.microsoft.com/office/drawing/2014/main" id="{E6030E62-8849-4371-9C75-3B2813E68591}"/>
+                <a16:creationId xmlns:a16="http://schemas.microsoft.com/office/drawing/2014/main" id="{AE7F41BB-23DA-4996-9BED-F21719726C4A}"/>
               </a:ext>
             </a:extLst>
           </p:cNvPr>
@@ -11199,7 +11207,7 @@
           <p:cNvPr id="6" name="">
             <a:extLst xmlns:a="http://schemas.openxmlformats.org/drawingml/2006/main">
               <a:ext uri="{FF2B5EF4-FFF2-40B4-BE49-F238E27FC236}">
-                <a16:creationId xmlns:a16="http://schemas.microsoft.com/office/drawing/2014/main" id="{FF1F8F2B-EECF-450D-BEB5-9173B96D15AD}"/>
+                <a16:creationId xmlns:a16="http://schemas.microsoft.com/office/drawing/2014/main" id="{2AEBBD4B-A356-469B-86DA-7555AA932459}"/>
               </a:ext>
             </a:extLst>
           </p:cNvPr>
@@ -11256,7 +11264,7 @@
           <p:cNvPr id="7" name="">
             <a:extLst xmlns:a="http://schemas.openxmlformats.org/drawingml/2006/main">
               <a:ext uri="{FF2B5EF4-FFF2-40B4-BE49-F238E27FC236}">
-                <a16:creationId xmlns:a16="http://schemas.microsoft.com/office/drawing/2014/main" id="{B1F3CCDE-2922-452B-996C-9A608333990D}"/>
+                <a16:creationId xmlns:a16="http://schemas.microsoft.com/office/drawing/2014/main" id="{1361AF10-58A4-46AE-B8A4-DCD6B471271E}"/>
               </a:ext>
             </a:extLst>
           </p:cNvPr>
@@ -11288,7 +11296,7 @@
           <p:cNvPr id="8" name="">
             <a:extLst xmlns:a="http://schemas.openxmlformats.org/drawingml/2006/main">
               <a:ext uri="{FF2B5EF4-FFF2-40B4-BE49-F238E27FC236}">
-                <a16:creationId xmlns:a16="http://schemas.microsoft.com/office/drawing/2014/main" id="{FE5CDE8B-F305-4E5A-9DAD-2426E70F6DF9}"/>
+                <a16:creationId xmlns:a16="http://schemas.microsoft.com/office/drawing/2014/main" id="{9AC4FB6D-CF4E-4F09-8EF0-427D22D81862}"/>
               </a:ext>
             </a:extLst>
           </p:cNvPr>
@@ -11345,7 +11353,7 @@
           <p:cNvPr id="9" name="">
             <a:extLst xmlns:a="http://schemas.openxmlformats.org/drawingml/2006/main">
               <a:ext uri="{FF2B5EF4-FFF2-40B4-BE49-F238E27FC236}">
-                <a16:creationId xmlns:a16="http://schemas.microsoft.com/office/drawing/2014/main" id="{A41DE4F0-584C-47BB-B200-D2082B2C28CC}"/>
+                <a16:creationId xmlns:a16="http://schemas.microsoft.com/office/drawing/2014/main" id="{36FE543E-BE97-41DD-8558-7BC775683B56}"/>
               </a:ext>
             </a:extLst>
           </p:cNvPr>
@@ -11406,7 +11414,7 @@
           <p:nvPr/>
         </p:nvPicPr>
         <p:blipFill>
-          <a:blip xmlns:r="http://schemas.openxmlformats.org/officeDocument/2006/relationships" xmlns:a="http://schemas.openxmlformats.org/drawingml/2006/main" r:embed="Reac06ceb3b3c40ad"/>
+          <a:blip xmlns:r="http://schemas.openxmlformats.org/officeDocument/2006/relationships" xmlns:a="http://schemas.openxmlformats.org/drawingml/2006/main" r:embed="Ra0b2db4202434949"/>
           <a:stretch xmlns:a="http://schemas.openxmlformats.org/drawingml/2006/main"/>
         </p:blipFill>
         <p:spPr>
@@ -11424,7 +11432,7 @@
           <p:cNvPr id="11" name="">
             <a:extLst xmlns:a="http://schemas.openxmlformats.org/drawingml/2006/main">
               <a:ext uri="{FF2B5EF4-FFF2-40B4-BE49-F238E27FC236}">
-                <a16:creationId xmlns:a16="http://schemas.microsoft.com/office/drawing/2014/main" id="{3324D86D-DF8B-4974-825B-4FB38482C6A3}"/>
+                <a16:creationId xmlns:a16="http://schemas.microsoft.com/office/drawing/2014/main" id="{D1864747-26AF-4518-B035-7571EC86EDC9}"/>
               </a:ext>
             </a:extLst>
           </p:cNvPr>
@@ -11481,7 +11489,7 @@
           <p:cNvPr id="12" name="">
             <a:extLst xmlns:a="http://schemas.openxmlformats.org/drawingml/2006/main">
               <a:ext uri="{FF2B5EF4-FFF2-40B4-BE49-F238E27FC236}">
-                <a16:creationId xmlns:a16="http://schemas.microsoft.com/office/drawing/2014/main" id="{2FBC0FB5-D907-44A6-82F0-45B4F2AA97F7}"/>
+                <a16:creationId xmlns:a16="http://schemas.microsoft.com/office/drawing/2014/main" id="{77C222D3-0CD6-425F-9C33-4F41468F4AA1}"/>
               </a:ext>
             </a:extLst>
           </p:cNvPr>
@@ -11538,7 +11546,7 @@
           <p:cNvPr id="13" name="">
             <a:extLst xmlns:a="http://schemas.openxmlformats.org/drawingml/2006/main">
               <a:ext uri="{FF2B5EF4-FFF2-40B4-BE49-F238E27FC236}">
-                <a16:creationId xmlns:a16="http://schemas.microsoft.com/office/drawing/2014/main" id="{B65B3712-3D21-4465-B16F-678810EE6D52}"/>
+                <a16:creationId xmlns:a16="http://schemas.microsoft.com/office/drawing/2014/main" id="{E4D7754D-72D8-48C7-99C7-F53EBE895579}"/>
               </a:ext>
             </a:extLst>
           </p:cNvPr>
@@ -11570,7 +11578,7 @@
           <p:cNvPr id="14" name="">
             <a:extLst xmlns:a="http://schemas.openxmlformats.org/drawingml/2006/main">
               <a:ext uri="{FF2B5EF4-FFF2-40B4-BE49-F238E27FC236}">
-                <a16:creationId xmlns:a16="http://schemas.microsoft.com/office/drawing/2014/main" id="{3C050185-B671-40A0-B894-4F9C82311ABF}"/>
+                <a16:creationId xmlns:a16="http://schemas.microsoft.com/office/drawing/2014/main" id="{F31741C6-80EC-48C4-AFC9-FDE9B530A1C4}"/>
               </a:ext>
             </a:extLst>
           </p:cNvPr>
@@ -11627,7 +11635,7 @@
           <p:cNvPr id="15" name="">
             <a:extLst xmlns:a="http://schemas.openxmlformats.org/drawingml/2006/main">
               <a:ext uri="{FF2B5EF4-FFF2-40B4-BE49-F238E27FC236}">
-                <a16:creationId xmlns:a16="http://schemas.microsoft.com/office/drawing/2014/main" id="{C2240ED2-3F78-4A0A-BC6C-A27DC155F77A}"/>
+                <a16:creationId xmlns:a16="http://schemas.microsoft.com/office/drawing/2014/main" id="{6F1F64A0-4AFD-434E-8818-002865500DE4}"/>
               </a:ext>
             </a:extLst>
           </p:cNvPr>
@@ -11682,7 +11690,7 @@
     </p:spTree>
     <p:extLst>
       <p:ext uri="{BB962C8B-B14F-4D97-AF65-F5344CB8AC3E}">
-        <p14:creationId xmlns:p14="http://schemas.microsoft.com/office/powerpoint/2010/main" val="234416975"/>
+        <p14:creationId xmlns:p14="http://schemas.microsoft.com/office/powerpoint/2010/main" val="423426144"/>
       </p:ext>
     </p:extLst>
   </p:cSld>
@@ -11837,7 +11845,7 @@
           <p:cNvPr id="23" name="">
             <a:extLst xmlns:a="http://schemas.openxmlformats.org/drawingml/2006/main">
               <a:ext uri="{FF2B5EF4-FFF2-40B4-BE49-F238E27FC236}">
-                <a16:creationId xmlns:a16="http://schemas.microsoft.com/office/drawing/2014/main" id="{8C0F5FC2-53BF-41D9-AEEF-0D8A57067DA4}"/>
+                <a16:creationId xmlns:a16="http://schemas.microsoft.com/office/drawing/2014/main" id="{F3CFF84B-2502-4671-BD62-50F60C4646A8}"/>
               </a:ext>
             </a:extLst>
           </p:cNvPr>
@@ -11869,7 +11877,7 @@
           <p:cNvPr id="2" name="">
             <a:extLst xmlns:a="http://schemas.openxmlformats.org/drawingml/2006/main">
               <a:ext uri="{FF2B5EF4-FFF2-40B4-BE49-F238E27FC236}">
-                <a16:creationId xmlns:a16="http://schemas.microsoft.com/office/drawing/2014/main" id="{B7753A48-6998-4CDA-A19E-055600AE07A3}"/>
+                <a16:creationId xmlns:a16="http://schemas.microsoft.com/office/drawing/2014/main" id="{AD23B0C6-B4B0-4C17-A0F2-C687BCC22808}"/>
               </a:ext>
             </a:extLst>
           </p:cNvPr>
@@ -11926,7 +11934,7 @@
           <p:cNvPr id="3" name="">
             <a:extLst xmlns:a="http://schemas.openxmlformats.org/drawingml/2006/main">
               <a:ext uri="{FF2B5EF4-FFF2-40B4-BE49-F238E27FC236}">
-                <a16:creationId xmlns:a16="http://schemas.microsoft.com/office/drawing/2014/main" id="{3A521052-946B-41F0-B651-12A918EAE4F2}"/>
+                <a16:creationId xmlns:a16="http://schemas.microsoft.com/office/drawing/2014/main" id="{7F4D5FE6-1A80-4DC7-AEBC-4262A1EAD52B}"/>
               </a:ext>
             </a:extLst>
           </p:cNvPr>
@@ -11958,7 +11966,7 @@
           <p:cNvPr id="4" name="">
             <a:extLst xmlns:a="http://schemas.openxmlformats.org/drawingml/2006/main">
               <a:ext uri="{FF2B5EF4-FFF2-40B4-BE49-F238E27FC236}">
-                <a16:creationId xmlns:a16="http://schemas.microsoft.com/office/drawing/2014/main" id="{97B991A7-FC6A-4F22-A5A5-BD0CD2E985A7}"/>
+                <a16:creationId xmlns:a16="http://schemas.microsoft.com/office/drawing/2014/main" id="{FC9C2ECD-E587-4208-B5E4-C7BBC06865F3}"/>
               </a:ext>
             </a:extLst>
           </p:cNvPr>
@@ -12015,7 +12023,7 @@
           <p:cNvPr id="5" name="">
             <a:extLst xmlns:a="http://schemas.openxmlformats.org/drawingml/2006/main">
               <a:ext uri="{FF2B5EF4-FFF2-40B4-BE49-F238E27FC236}">
-                <a16:creationId xmlns:a16="http://schemas.microsoft.com/office/drawing/2014/main" id="{F5FA6143-3B37-4AEC-851E-4CFD31A8A7C7}"/>
+                <a16:creationId xmlns:a16="http://schemas.microsoft.com/office/drawing/2014/main" id="{9D338CC6-DAB5-4EF3-90F6-D1ABF5238E56}"/>
               </a:ext>
             </a:extLst>
           </p:cNvPr>
@@ -12072,7 +12080,7 @@
           <p:cNvPr id="6" name="">
             <a:extLst xmlns:a="http://schemas.openxmlformats.org/drawingml/2006/main">
               <a:ext uri="{FF2B5EF4-FFF2-40B4-BE49-F238E27FC236}">
-                <a16:creationId xmlns:a16="http://schemas.microsoft.com/office/drawing/2014/main" id="{ACADD104-8784-4CC1-9590-007DDE49DAB3}"/>
+                <a16:creationId xmlns:a16="http://schemas.microsoft.com/office/drawing/2014/main" id="{B9CE93C1-9263-4668-A6AB-207629DF9426}"/>
               </a:ext>
             </a:extLst>
           </p:cNvPr>
@@ -12129,7 +12137,7 @@
           <p:cNvPr id="7" name="">
             <a:extLst xmlns:a="http://schemas.openxmlformats.org/drawingml/2006/main">
               <a:ext uri="{FF2B5EF4-FFF2-40B4-BE49-F238E27FC236}">
-                <a16:creationId xmlns:a16="http://schemas.microsoft.com/office/drawing/2014/main" id="{DE34A60C-6736-4C1E-97C9-C799B322356C}"/>
+                <a16:creationId xmlns:a16="http://schemas.microsoft.com/office/drawing/2014/main" id="{87E46AD2-4CE6-4158-A372-B1B79187E5EE}"/>
               </a:ext>
             </a:extLst>
           </p:cNvPr>
@@ -12161,7 +12169,7 @@
           <p:cNvPr id="8" name="">
             <a:extLst xmlns:a="http://schemas.openxmlformats.org/drawingml/2006/main">
               <a:ext uri="{FF2B5EF4-FFF2-40B4-BE49-F238E27FC236}">
-                <a16:creationId xmlns:a16="http://schemas.microsoft.com/office/drawing/2014/main" id="{B2132C2E-77E9-48CA-A2AB-5F26AE960697}"/>
+                <a16:creationId xmlns:a16="http://schemas.microsoft.com/office/drawing/2014/main" id="{B23D0D0B-1386-4912-987D-4EB632ADE680}"/>
               </a:ext>
             </a:extLst>
           </p:cNvPr>
@@ -12218,7 +12226,7 @@
           <p:cNvPr id="9" name="">
             <a:extLst xmlns:a="http://schemas.openxmlformats.org/drawingml/2006/main">
               <a:ext uri="{FF2B5EF4-FFF2-40B4-BE49-F238E27FC236}">
-                <a16:creationId xmlns:a16="http://schemas.microsoft.com/office/drawing/2014/main" id="{4385990E-0DF4-4849-8F75-1A8B49ECC93B}"/>
+                <a16:creationId xmlns:a16="http://schemas.microsoft.com/office/drawing/2014/main" id="{920929B5-4527-474E-BCB4-F972F5908D50}"/>
               </a:ext>
             </a:extLst>
           </p:cNvPr>
@@ -12275,7 +12283,7 @@
           <p:cNvPr id="10" name="">
             <a:extLst xmlns:a="http://schemas.openxmlformats.org/drawingml/2006/main">
               <a:ext uri="{FF2B5EF4-FFF2-40B4-BE49-F238E27FC236}">
-                <a16:creationId xmlns:a16="http://schemas.microsoft.com/office/drawing/2014/main" id="{6952ABF3-BFA1-4004-963A-1451BF13CE74}"/>
+                <a16:creationId xmlns:a16="http://schemas.microsoft.com/office/drawing/2014/main" id="{6360C7A5-F12A-4BB7-A040-4F8898ECB88C}"/>
               </a:ext>
             </a:extLst>
           </p:cNvPr>
@@ -12309,7 +12317,7 @@
           <p:cNvPr id="11" name="">
             <a:extLst xmlns:a="http://schemas.openxmlformats.org/drawingml/2006/main">
               <a:ext uri="{FF2B5EF4-FFF2-40B4-BE49-F238E27FC236}">
-                <a16:creationId xmlns:a16="http://schemas.microsoft.com/office/drawing/2014/main" id="{411D02BC-0062-4875-898E-BBCDC71BA452}"/>
+                <a16:creationId xmlns:a16="http://schemas.microsoft.com/office/drawing/2014/main" id="{216E9A0E-BA84-4768-99AB-28AC9CA9076B}"/>
               </a:ext>
             </a:extLst>
           </p:cNvPr>
@@ -12341,7 +12349,7 @@
           <p:cNvPr id="12" name="">
             <a:extLst xmlns:a="http://schemas.openxmlformats.org/drawingml/2006/main">
               <a:ext uri="{FF2B5EF4-FFF2-40B4-BE49-F238E27FC236}">
-                <a16:creationId xmlns:a16="http://schemas.microsoft.com/office/drawing/2014/main" id="{55E38D8F-3D64-4E1F-975A-4F6680F0E4A7}"/>
+                <a16:creationId xmlns:a16="http://schemas.microsoft.com/office/drawing/2014/main" id="{7CE912C4-085F-485D-9A25-F676F2F5D7FD}"/>
               </a:ext>
             </a:extLst>
           </p:cNvPr>
@@ -12398,7 +12406,7 @@
           <p:cNvPr id="13" name="">
             <a:extLst xmlns:a="http://schemas.openxmlformats.org/drawingml/2006/main">
               <a:ext uri="{FF2B5EF4-FFF2-40B4-BE49-F238E27FC236}">
-                <a16:creationId xmlns:a16="http://schemas.microsoft.com/office/drawing/2014/main" id="{22857289-7325-4BB9-BF4D-00D60F75790A}"/>
+                <a16:creationId xmlns:a16="http://schemas.microsoft.com/office/drawing/2014/main" id="{0095E0BC-E870-4B3E-B134-72EF4970BC7C}"/>
               </a:ext>
             </a:extLst>
           </p:cNvPr>
@@ -12455,7 +12463,7 @@
           <p:cNvPr id="14" name="">
             <a:extLst xmlns:a="http://schemas.openxmlformats.org/drawingml/2006/main">
               <a:ext uri="{FF2B5EF4-FFF2-40B4-BE49-F238E27FC236}">
-                <a16:creationId xmlns:a16="http://schemas.microsoft.com/office/drawing/2014/main" id="{8651D36E-1082-4D86-8E1D-8AFFAA06B329}"/>
+                <a16:creationId xmlns:a16="http://schemas.microsoft.com/office/drawing/2014/main" id="{88D9F032-D642-4899-B950-93E6BAE90EE5}"/>
               </a:ext>
             </a:extLst>
           </p:cNvPr>
@@ -12489,7 +12497,7 @@
           <p:cNvPr id="15" name="">
             <a:extLst xmlns:a="http://schemas.openxmlformats.org/drawingml/2006/main">
               <a:ext uri="{FF2B5EF4-FFF2-40B4-BE49-F238E27FC236}">
-                <a16:creationId xmlns:a16="http://schemas.microsoft.com/office/drawing/2014/main" id="{6F59A004-7785-42EE-80FA-873A533DF5E3}"/>
+                <a16:creationId xmlns:a16="http://schemas.microsoft.com/office/drawing/2014/main" id="{6C99EC1B-96DE-4557-88CB-43C3E4F37131}"/>
               </a:ext>
             </a:extLst>
           </p:cNvPr>
@@ -12521,7 +12529,7 @@
           <p:cNvPr id="16" name="">
             <a:extLst xmlns:a="http://schemas.openxmlformats.org/drawingml/2006/main">
               <a:ext uri="{FF2B5EF4-FFF2-40B4-BE49-F238E27FC236}">
-                <a16:creationId xmlns:a16="http://schemas.microsoft.com/office/drawing/2014/main" id="{45540A4C-8011-4CAF-AB8D-62D067D93FE8}"/>
+                <a16:creationId xmlns:a16="http://schemas.microsoft.com/office/drawing/2014/main" id="{2AD7B0A9-114F-4745-9F2E-BE277B92F538}"/>
               </a:ext>
             </a:extLst>
           </p:cNvPr>
@@ -12578,7 +12586,7 @@
           <p:cNvPr id="17" name="">
             <a:extLst xmlns:a="http://schemas.openxmlformats.org/drawingml/2006/main">
               <a:ext uri="{FF2B5EF4-FFF2-40B4-BE49-F238E27FC236}">
-                <a16:creationId xmlns:a16="http://schemas.microsoft.com/office/drawing/2014/main" id="{89D95E2B-3A84-4E88-A134-885C02650ED2}"/>
+                <a16:creationId xmlns:a16="http://schemas.microsoft.com/office/drawing/2014/main" id="{20327EE5-D119-4D31-A77C-E2001A07BDDD}"/>
               </a:ext>
             </a:extLst>
           </p:cNvPr>
@@ -12635,7 +12643,7 @@
           <p:cNvPr id="18" name="">
             <a:extLst xmlns:a="http://schemas.openxmlformats.org/drawingml/2006/main">
               <a:ext uri="{FF2B5EF4-FFF2-40B4-BE49-F238E27FC236}">
-                <a16:creationId xmlns:a16="http://schemas.microsoft.com/office/drawing/2014/main" id="{52566624-5F0B-44FA-9D41-FC967DC2E205}"/>
+                <a16:creationId xmlns:a16="http://schemas.microsoft.com/office/drawing/2014/main" id="{F9694B10-6F44-4871-B73A-22A244E64149}"/>
               </a:ext>
             </a:extLst>
           </p:cNvPr>
@@ -12669,7 +12677,7 @@
           <p:cNvPr id="19" name="">
             <a:extLst xmlns:a="http://schemas.openxmlformats.org/drawingml/2006/main">
               <a:ext uri="{FF2B5EF4-FFF2-40B4-BE49-F238E27FC236}">
-                <a16:creationId xmlns:a16="http://schemas.microsoft.com/office/drawing/2014/main" id="{8178EE5D-B82D-4DBE-9AAF-D2FCE3224C87}"/>
+                <a16:creationId xmlns:a16="http://schemas.microsoft.com/office/drawing/2014/main" id="{D6F2FE9D-EDFA-4066-913A-624375F0F40B}"/>
               </a:ext>
             </a:extLst>
           </p:cNvPr>
@@ -12701,7 +12709,7 @@
           <p:cNvPr id="20" name="">
             <a:extLst xmlns:a="http://schemas.openxmlformats.org/drawingml/2006/main">
               <a:ext uri="{FF2B5EF4-FFF2-40B4-BE49-F238E27FC236}">
-                <a16:creationId xmlns:a16="http://schemas.microsoft.com/office/drawing/2014/main" id="{3C31BEB5-4FE3-4D26-932B-B9D91AD0A844}"/>
+                <a16:creationId xmlns:a16="http://schemas.microsoft.com/office/drawing/2014/main" id="{970A5505-FBC0-41FA-8516-E7C620EE98E8}"/>
               </a:ext>
             </a:extLst>
           </p:cNvPr>
@@ -12758,7 +12766,7 @@
           <p:cNvPr id="21" name="">
             <a:extLst xmlns:a="http://schemas.openxmlformats.org/drawingml/2006/main">
               <a:ext uri="{FF2B5EF4-FFF2-40B4-BE49-F238E27FC236}">
-                <a16:creationId xmlns:a16="http://schemas.microsoft.com/office/drawing/2014/main" id="{370EEA2C-0900-488A-92EA-95C6F6BE330F}"/>
+                <a16:creationId xmlns:a16="http://schemas.microsoft.com/office/drawing/2014/main" id="{00246ECB-C4CE-44FA-AB3D-5DC78EAC670D}"/>
               </a:ext>
             </a:extLst>
           </p:cNvPr>
@@ -12815,7 +12823,7 @@
           <p:cNvPr id="22" name="">
             <a:extLst xmlns:a="http://schemas.openxmlformats.org/drawingml/2006/main">
               <a:ext uri="{FF2B5EF4-FFF2-40B4-BE49-F238E27FC236}">
-                <a16:creationId xmlns:a16="http://schemas.microsoft.com/office/drawing/2014/main" id="{9F0DEE9C-A345-49BC-8365-2F5BBAC0FE0B}"/>
+                <a16:creationId xmlns:a16="http://schemas.microsoft.com/office/drawing/2014/main" id="{1DA713C6-D2C7-406C-9B17-7B89F2EA6BB6}"/>
               </a:ext>
             </a:extLst>
           </p:cNvPr>
@@ -12870,7 +12878,7 @@
     </p:spTree>
     <p:extLst>
       <p:ext uri="{BB962C8B-B14F-4D97-AF65-F5344CB8AC3E}">
-        <p14:creationId xmlns:p14="http://schemas.microsoft.com/office/powerpoint/2010/main" val="1764284556"/>
+        <p14:creationId xmlns:p14="http://schemas.microsoft.com/office/powerpoint/2010/main" val="145249522"/>
       </p:ext>
     </p:extLst>
   </p:cSld>
@@ -13071,7 +13079,7 @@
           <p:cNvPr id="22" name="">
             <a:extLst xmlns:a="http://schemas.openxmlformats.org/drawingml/2006/main">
               <a:ext uri="{FF2B5EF4-FFF2-40B4-BE49-F238E27FC236}">
-                <a16:creationId xmlns:a16="http://schemas.microsoft.com/office/drawing/2014/main" id="{AFAC1803-1BDD-4382-9BD3-B1A695F40CDD}"/>
+                <a16:creationId xmlns:a16="http://schemas.microsoft.com/office/drawing/2014/main" id="{82FF4C7D-82EA-41B4-987E-FBDF2C897D4D}"/>
               </a:ext>
             </a:extLst>
           </p:cNvPr>
@@ -13103,7 +13111,7 @@
           <p:cNvPr id="2" name="">
             <a:extLst xmlns:a="http://schemas.openxmlformats.org/drawingml/2006/main">
               <a:ext uri="{FF2B5EF4-FFF2-40B4-BE49-F238E27FC236}">
-                <a16:creationId xmlns:a16="http://schemas.microsoft.com/office/drawing/2014/main" id="{77124CF5-C656-4152-BF84-277F953AC346}"/>
+                <a16:creationId xmlns:a16="http://schemas.microsoft.com/office/drawing/2014/main" id="{41841175-5F48-498F-A9D7-97922774F87D}"/>
               </a:ext>
             </a:extLst>
           </p:cNvPr>
@@ -13160,7 +13168,7 @@
           <p:cNvPr id="3" name="">
             <a:extLst xmlns:a="http://schemas.openxmlformats.org/drawingml/2006/main">
               <a:ext uri="{FF2B5EF4-FFF2-40B4-BE49-F238E27FC236}">
-                <a16:creationId xmlns:a16="http://schemas.microsoft.com/office/drawing/2014/main" id="{26D4D527-70EF-4379-83FC-A4754572536B}"/>
+                <a16:creationId xmlns:a16="http://schemas.microsoft.com/office/drawing/2014/main" id="{BA52B3D2-F6E6-4B98-992E-56365AE32568}"/>
               </a:ext>
             </a:extLst>
           </p:cNvPr>
@@ -13192,7 +13200,7 @@
           <p:cNvPr id="4" name="">
             <a:extLst xmlns:a="http://schemas.openxmlformats.org/drawingml/2006/main">
               <a:ext uri="{FF2B5EF4-FFF2-40B4-BE49-F238E27FC236}">
-                <a16:creationId xmlns:a16="http://schemas.microsoft.com/office/drawing/2014/main" id="{F2AC4CF2-3083-452A-BC51-C4CE7D39E945}"/>
+                <a16:creationId xmlns:a16="http://schemas.microsoft.com/office/drawing/2014/main" id="{3A451FDB-9ADE-43C7-8A0C-33D306DF136F}"/>
               </a:ext>
             </a:extLst>
           </p:cNvPr>
@@ -13249,7 +13257,7 @@
           <p:cNvPr id="5" name="">
             <a:extLst xmlns:a="http://schemas.openxmlformats.org/drawingml/2006/main">
               <a:ext uri="{FF2B5EF4-FFF2-40B4-BE49-F238E27FC236}">
-                <a16:creationId xmlns:a16="http://schemas.microsoft.com/office/drawing/2014/main" id="{8F01376C-2722-4CD9-B850-FD1BCC6BA254}"/>
+                <a16:creationId xmlns:a16="http://schemas.microsoft.com/office/drawing/2014/main" id="{542BB2C1-693A-4BD9-8113-BF218E884CCB}"/>
               </a:ext>
             </a:extLst>
           </p:cNvPr>
@@ -13306,7 +13314,7 @@
           <p:cNvPr id="6" name="">
             <a:extLst xmlns:a="http://schemas.openxmlformats.org/drawingml/2006/main">
               <a:ext uri="{FF2B5EF4-FFF2-40B4-BE49-F238E27FC236}">
-                <a16:creationId xmlns:a16="http://schemas.microsoft.com/office/drawing/2014/main" id="{296E1958-CEC8-477E-B896-0DF1881FD246}"/>
+                <a16:creationId xmlns:a16="http://schemas.microsoft.com/office/drawing/2014/main" id="{3BFBBAAD-E6B3-40E6-A012-6945D0302E78}"/>
               </a:ext>
             </a:extLst>
           </p:cNvPr>
@@ -13363,7 +13371,7 @@
           <p:cNvPr id="7" name="">
             <a:extLst xmlns:a="http://schemas.openxmlformats.org/drawingml/2006/main">
               <a:ext uri="{FF2B5EF4-FFF2-40B4-BE49-F238E27FC236}">
-                <a16:creationId xmlns:a16="http://schemas.microsoft.com/office/drawing/2014/main" id="{C5D97E0C-1183-422F-87D8-BE0A51A57FFB}"/>
+                <a16:creationId xmlns:a16="http://schemas.microsoft.com/office/drawing/2014/main" id="{CBF230FA-170D-4ABB-92AB-83B81FA2B517}"/>
               </a:ext>
             </a:extLst>
           </p:cNvPr>
@@ -13395,7 +13403,7 @@
           <p:cNvPr id="8" name="">
             <a:extLst xmlns:a="http://schemas.openxmlformats.org/drawingml/2006/main">
               <a:ext uri="{FF2B5EF4-FFF2-40B4-BE49-F238E27FC236}">
-                <a16:creationId xmlns:a16="http://schemas.microsoft.com/office/drawing/2014/main" id="{E9DADBF3-1B21-47A9-8B69-2AF717154EFF}"/>
+                <a16:creationId xmlns:a16="http://schemas.microsoft.com/office/drawing/2014/main" id="{12B8864E-D83C-4202-81C3-8AE7A889AB7A}"/>
               </a:ext>
             </a:extLst>
           </p:cNvPr>
@@ -13452,7 +13460,7 @@
           <p:cNvPr id="9" name="">
             <a:extLst xmlns:a="http://schemas.openxmlformats.org/drawingml/2006/main">
               <a:ext uri="{FF2B5EF4-FFF2-40B4-BE49-F238E27FC236}">
-                <a16:creationId xmlns:a16="http://schemas.microsoft.com/office/drawing/2014/main" id="{CBD589C2-0DDF-49F3-A79F-23CC4D7A763B}"/>
+                <a16:creationId xmlns:a16="http://schemas.microsoft.com/office/drawing/2014/main" id="{C567B60E-B184-4E5B-A9D1-C0E6A0C4640A}"/>
               </a:ext>
             </a:extLst>
           </p:cNvPr>
@@ -13509,7 +13517,7 @@
           <p:cNvPr id="10" name="">
             <a:extLst xmlns:a="http://schemas.openxmlformats.org/drawingml/2006/main">
               <a:ext uri="{FF2B5EF4-FFF2-40B4-BE49-F238E27FC236}">
-                <a16:creationId xmlns:a16="http://schemas.microsoft.com/office/drawing/2014/main" id="{57CB25FC-6C77-4D99-9288-2982A38A7F16}"/>
+                <a16:creationId xmlns:a16="http://schemas.microsoft.com/office/drawing/2014/main" id="{1C687908-A863-41B3-943E-A456734BA71D}"/>
               </a:ext>
             </a:extLst>
           </p:cNvPr>
@@ -13543,7 +13551,7 @@
           <p:cNvPr id="11" name="">
             <a:extLst xmlns:a="http://schemas.openxmlformats.org/drawingml/2006/main">
               <a:ext uri="{FF2B5EF4-FFF2-40B4-BE49-F238E27FC236}">
-                <a16:creationId xmlns:a16="http://schemas.microsoft.com/office/drawing/2014/main" id="{DA294B5E-50ED-4468-88F7-F8F3ACE09DBF}"/>
+                <a16:creationId xmlns:a16="http://schemas.microsoft.com/office/drawing/2014/main" id="{57266E41-6F94-4292-817D-0DFF830B8BF3}"/>
               </a:ext>
             </a:extLst>
           </p:cNvPr>
@@ -13575,7 +13583,7 @@
           <p:cNvPr id="12" name="">
             <a:extLst xmlns:a="http://schemas.openxmlformats.org/drawingml/2006/main">
               <a:ext uri="{FF2B5EF4-FFF2-40B4-BE49-F238E27FC236}">
-                <a16:creationId xmlns:a16="http://schemas.microsoft.com/office/drawing/2014/main" id="{F417521F-F5DF-4CDA-83C5-9F5D2719500B}"/>
+                <a16:creationId xmlns:a16="http://schemas.microsoft.com/office/drawing/2014/main" id="{BD979615-FDF3-4379-AA18-2C013CC7859A}"/>
               </a:ext>
             </a:extLst>
           </p:cNvPr>
@@ -13632,7 +13640,7 @@
           <p:cNvPr id="13" name="">
             <a:extLst xmlns:a="http://schemas.openxmlformats.org/drawingml/2006/main">
               <a:ext uri="{FF2B5EF4-FFF2-40B4-BE49-F238E27FC236}">
-                <a16:creationId xmlns:a16="http://schemas.microsoft.com/office/drawing/2014/main" id="{D4FEBB4E-4848-4A2F-AC86-F9B90073E615}"/>
+                <a16:creationId xmlns:a16="http://schemas.microsoft.com/office/drawing/2014/main" id="{6D66B3BA-840B-4BF4-91CA-EE757FCE76A6}"/>
               </a:ext>
             </a:extLst>
           </p:cNvPr>
@@ -13689,7 +13697,7 @@
           <p:cNvPr id="14" name="">
             <a:extLst xmlns:a="http://schemas.openxmlformats.org/drawingml/2006/main">
               <a:ext uri="{FF2B5EF4-FFF2-40B4-BE49-F238E27FC236}">
-                <a16:creationId xmlns:a16="http://schemas.microsoft.com/office/drawing/2014/main" id="{1780A5DB-03F1-4A3F-BCFA-BAF7F9745E49}"/>
+                <a16:creationId xmlns:a16="http://schemas.microsoft.com/office/drawing/2014/main" id="{9AE05B71-FA4E-4DC1-87A2-389F8216D779}"/>
               </a:ext>
             </a:extLst>
           </p:cNvPr>
@@ -13723,7 +13731,7 @@
           <p:cNvPr id="15" name="">
             <a:extLst xmlns:a="http://schemas.openxmlformats.org/drawingml/2006/main">
               <a:ext uri="{FF2B5EF4-FFF2-40B4-BE49-F238E27FC236}">
-                <a16:creationId xmlns:a16="http://schemas.microsoft.com/office/drawing/2014/main" id="{D0447796-EDED-4EAC-82A0-FAF5A98FF108}"/>
+                <a16:creationId xmlns:a16="http://schemas.microsoft.com/office/drawing/2014/main" id="{CADE4709-300E-4CF2-BFE0-6948EEF77AD6}"/>
               </a:ext>
             </a:extLst>
           </p:cNvPr>
@@ -13755,7 +13763,7 @@
           <p:cNvPr id="16" name="">
             <a:extLst xmlns:a="http://schemas.openxmlformats.org/drawingml/2006/main">
               <a:ext uri="{FF2B5EF4-FFF2-40B4-BE49-F238E27FC236}">
-                <a16:creationId xmlns:a16="http://schemas.microsoft.com/office/drawing/2014/main" id="{240E5B36-6486-4406-A7EB-CF74C89B33D7}"/>
+                <a16:creationId xmlns:a16="http://schemas.microsoft.com/office/drawing/2014/main" id="{7F66B343-01A8-4CC6-90EA-C49805DA5417}"/>
               </a:ext>
             </a:extLst>
           </p:cNvPr>
@@ -13812,7 +13820,7 @@
           <p:cNvPr id="17" name="">
             <a:extLst xmlns:a="http://schemas.openxmlformats.org/drawingml/2006/main">
               <a:ext uri="{FF2B5EF4-FFF2-40B4-BE49-F238E27FC236}">
-                <a16:creationId xmlns:a16="http://schemas.microsoft.com/office/drawing/2014/main" id="{190A4723-C8D6-4118-8501-51FB50E37061}"/>
+                <a16:creationId xmlns:a16="http://schemas.microsoft.com/office/drawing/2014/main" id="{1B9083C7-C357-4E06-BE54-5E15F84F39DE}"/>
               </a:ext>
             </a:extLst>
           </p:cNvPr>
@@ -13869,7 +13877,7 @@
           <p:cNvPr id="18" name="">
             <a:extLst xmlns:a="http://schemas.openxmlformats.org/drawingml/2006/main">
               <a:ext uri="{FF2B5EF4-FFF2-40B4-BE49-F238E27FC236}">
-                <a16:creationId xmlns:a16="http://schemas.microsoft.com/office/drawing/2014/main" id="{8AF1A743-F041-4A7A-8E38-BE8E16582040}"/>
+                <a16:creationId xmlns:a16="http://schemas.microsoft.com/office/drawing/2014/main" id="{FC8B5FC4-9C34-432F-BA58-FFB7B8A2D601}"/>
               </a:ext>
             </a:extLst>
           </p:cNvPr>
@@ -13903,7 +13911,7 @@
           <p:cNvPr id="19" name="">
             <a:extLst xmlns:a="http://schemas.openxmlformats.org/drawingml/2006/main">
               <a:ext uri="{FF2B5EF4-FFF2-40B4-BE49-F238E27FC236}">
-                <a16:creationId xmlns:a16="http://schemas.microsoft.com/office/drawing/2014/main" id="{6F056208-F03A-4CEE-8318-54B02BD69898}"/>
+                <a16:creationId xmlns:a16="http://schemas.microsoft.com/office/drawing/2014/main" id="{693B3E58-EC32-476C-915B-C9039304F5E6}"/>
               </a:ext>
             </a:extLst>
           </p:cNvPr>
@@ -13935,7 +13943,7 @@
           <p:cNvPr id="20" name="">
             <a:extLst xmlns:a="http://schemas.openxmlformats.org/drawingml/2006/main">
               <a:ext uri="{FF2B5EF4-FFF2-40B4-BE49-F238E27FC236}">
-                <a16:creationId xmlns:a16="http://schemas.microsoft.com/office/drawing/2014/main" id="{D8F8A587-970C-45FE-BB57-B37A38FCA448}"/>
+                <a16:creationId xmlns:a16="http://schemas.microsoft.com/office/drawing/2014/main" id="{443A4FCC-D1A2-4D03-B1FD-B340E3DA6271}"/>
               </a:ext>
             </a:extLst>
           </p:cNvPr>
@@ -13992,7 +14000,7 @@
           <p:cNvPr id="21" name="">
             <a:extLst xmlns:a="http://schemas.openxmlformats.org/drawingml/2006/main">
               <a:ext uri="{FF2B5EF4-FFF2-40B4-BE49-F238E27FC236}">
-                <a16:creationId xmlns:a16="http://schemas.microsoft.com/office/drawing/2014/main" id="{5EDA436B-3C74-4DBF-B06B-E2505DF63D40}"/>
+                <a16:creationId xmlns:a16="http://schemas.microsoft.com/office/drawing/2014/main" id="{B2F68FB3-23BA-4292-BABB-DFA0652ED84F}"/>
               </a:ext>
             </a:extLst>
           </p:cNvPr>
@@ -14047,7 +14055,7 @@
     </p:spTree>
     <p:extLst>
       <p:ext uri="{BB962C8B-B14F-4D97-AF65-F5344CB8AC3E}">
-        <p14:creationId xmlns:p14="http://schemas.microsoft.com/office/powerpoint/2010/main" val="61935310"/>
+        <p14:creationId xmlns:p14="http://schemas.microsoft.com/office/powerpoint/2010/main" val="1958460873"/>
       </p:ext>
     </p:extLst>
   </p:cSld>
